--- a/Science_Teesside/Teaching_Packs/BUILD/lessons/W6A/BUILD_Science_Autumn1_W6A_Balanced_Plate.pptx
+++ b/Science_Teesside/Teaching_Packs/BUILD/lessons/W6A/BUILD_Science_Autumn1_W6A_Balanced_Plate.pptx
@@ -2,23 +2,23 @@
 <file path=ppt/presentation.xml><?xml version="1.0" encoding="utf-8"?>
 <p:presentation xmlns:p="http://schemas.openxmlformats.org/presentationml/2006/main">
   <p:sldMasterIdLst>
-    <p:sldMasterId xmlns:r="http://schemas.openxmlformats.org/officeDocument/2006/relationships" id="2147483648" r:id="Rd8db17b62f834ab2"/>
+    <p:sldMasterId xmlns:r="http://schemas.openxmlformats.org/officeDocument/2006/relationships" id="2147483648" r:id="R40ab41763b374bb4"/>
   </p:sldMasterIdLst>
   <p:notesMasterIdLst>
-    <p:notesMasterId xmlns:r="http://schemas.openxmlformats.org/officeDocument/2006/relationships" r:id="Rd1b03aaa200a4ab7"/>
+    <p:notesMasterId xmlns:r="http://schemas.openxmlformats.org/officeDocument/2006/relationships" r:id="R67d85c7eccac4eb9"/>
   </p:notesMasterIdLst>
   <p:sldIdLst>
-    <p:sldId xmlns:r="http://schemas.openxmlformats.org/officeDocument/2006/relationships" id="256" r:id="Rbd2dcfe476fb4420"/>
-    <p:sldId xmlns:r="http://schemas.openxmlformats.org/officeDocument/2006/relationships" id="257" r:id="R8c2bf148b92946aa"/>
-    <p:sldId xmlns:r="http://schemas.openxmlformats.org/officeDocument/2006/relationships" id="258" r:id="Rc7fbd34eea534564"/>
-    <p:sldId xmlns:r="http://schemas.openxmlformats.org/officeDocument/2006/relationships" id="259" r:id="R2368b0fd25244e2c"/>
-    <p:sldId xmlns:r="http://schemas.openxmlformats.org/officeDocument/2006/relationships" id="260" r:id="R8aca860f813541aa"/>
-    <p:sldId xmlns:r="http://schemas.openxmlformats.org/officeDocument/2006/relationships" id="261" r:id="R005036d1cd154ffc"/>
-    <p:sldId xmlns:r="http://schemas.openxmlformats.org/officeDocument/2006/relationships" id="262" r:id="Ra4fc1aa627414654"/>
-    <p:sldId xmlns:r="http://schemas.openxmlformats.org/officeDocument/2006/relationships" id="263" r:id="R632c195759634ee1"/>
-    <p:sldId xmlns:r="http://schemas.openxmlformats.org/officeDocument/2006/relationships" id="264" r:id="R0a7a7aa3e64042aa"/>
-    <p:sldId xmlns:r="http://schemas.openxmlformats.org/officeDocument/2006/relationships" id="265" r:id="Rfbdefc2eb7ed4b49"/>
-    <p:sldId xmlns:r="http://schemas.openxmlformats.org/officeDocument/2006/relationships" id="266" r:id="Rfa9d7988a2124b66"/>
+    <p:sldId xmlns:r="http://schemas.openxmlformats.org/officeDocument/2006/relationships" id="256" r:id="R0c32c2cc58934308"/>
+    <p:sldId xmlns:r="http://schemas.openxmlformats.org/officeDocument/2006/relationships" id="257" r:id="Rc7593d5fee384326"/>
+    <p:sldId xmlns:r="http://schemas.openxmlformats.org/officeDocument/2006/relationships" id="258" r:id="R50ed8ee9498f4a19"/>
+    <p:sldId xmlns:r="http://schemas.openxmlformats.org/officeDocument/2006/relationships" id="259" r:id="Rebd6b87233ed4c18"/>
+    <p:sldId xmlns:r="http://schemas.openxmlformats.org/officeDocument/2006/relationships" id="260" r:id="R6bf178ee4d1646e3"/>
+    <p:sldId xmlns:r="http://schemas.openxmlformats.org/officeDocument/2006/relationships" id="261" r:id="R3cb6709987a14495"/>
+    <p:sldId xmlns:r="http://schemas.openxmlformats.org/officeDocument/2006/relationships" id="262" r:id="Rfb751865f16d47ef"/>
+    <p:sldId xmlns:r="http://schemas.openxmlformats.org/officeDocument/2006/relationships" id="263" r:id="Rc1752f009b804087"/>
+    <p:sldId xmlns:r="http://schemas.openxmlformats.org/officeDocument/2006/relationships" id="264" r:id="R3db1e41147844773"/>
+    <p:sldId xmlns:r="http://schemas.openxmlformats.org/officeDocument/2006/relationships" id="265" r:id="Rb071bcbc41e64b04"/>
+    <p:sldId xmlns:r="http://schemas.openxmlformats.org/officeDocument/2006/relationships" id="266" r:id="R18aba68e97bf4717"/>
   </p:sldIdLst>
   <p:sldSz cx="12192000" cy="6858000"/>
   <p:notesSz cx="6858000" cy="9144000"/>
@@ -500,6 +500,15 @@
               <a:t>[/Sources]</a:t>
             </a:r>
           </a:p>
+          <a:p xmlns:a="http://schemas.openxmlformats.org/drawingml/2006/main">
+            <a:r>
+              <a:t>
+[Sources]
+https://madebymatt.uk/Lessons/Science_Teesside/Teaching_Packs/BUILD/ — original lesson text, timings and teacher notes retained.
+https://madebymatt.uk/Lessons/Science_Teesside/Build/ — existing Made by Matt scientific artwork, where shown.
+[/Sources]</a:t>
+            </a:r>
+          </a:p>
         </p:txBody>
       </p:sp>
       <p:sp>
@@ -615,6 +624,15 @@
               <a:t>[/Sources]</a:t>
             </a:r>
           </a:p>
+          <a:p xmlns:a="http://schemas.openxmlformats.org/drawingml/2006/main">
+            <a:r>
+              <a:t>
+[Sources]
+https://madebymatt.uk/Lessons/Science_Teesside/Teaching_Packs/BUILD/ — original lesson text, timings and teacher notes retained.
+https://madebymatt.uk/Lessons/Science_Teesside/Build/ — existing Made by Matt scientific artwork, where shown.
+[/Sources]</a:t>
+            </a:r>
+          </a:p>
         </p:txBody>
       </p:sp>
       <p:sp>
@@ -730,6 +748,15 @@
               <a:t>[/Sources]</a:t>
             </a:r>
           </a:p>
+          <a:p xmlns:a="http://schemas.openxmlformats.org/drawingml/2006/main">
+            <a:r>
+              <a:t>
+[Sources]
+https://madebymatt.uk/Lessons/Science_Teesside/Teaching_Packs/BUILD/ — original lesson text, timings and teacher notes retained.
+https://madebymatt.uk/Lessons/Science_Teesside/Build/ — existing Made by Matt scientific artwork, where shown.
+[/Sources]</a:t>
+            </a:r>
+          </a:p>
         </p:txBody>
       </p:sp>
       <p:sp>
@@ -845,6 +872,15 @@
               <a:t>[/Sources]</a:t>
             </a:r>
           </a:p>
+          <a:p xmlns:a="http://schemas.openxmlformats.org/drawingml/2006/main">
+            <a:r>
+              <a:t>
+[Sources]
+https://madebymatt.uk/Lessons/Science_Teesside/Teaching_Packs/BUILD/ — original lesson text, timings and teacher notes retained.
+https://madebymatt.uk/Lessons/Science_Teesside/Build/ — existing Made by Matt scientific artwork, where shown.
+[/Sources]</a:t>
+            </a:r>
+          </a:p>
         </p:txBody>
       </p:sp>
       <p:sp>
@@ -960,6 +996,15 @@
               <a:t>[/Sources]</a:t>
             </a:r>
           </a:p>
+          <a:p xmlns:a="http://schemas.openxmlformats.org/drawingml/2006/main">
+            <a:r>
+              <a:t>
+[Sources]
+https://madebymatt.uk/Lessons/Science_Teesside/Teaching_Packs/BUILD/ — original lesson text, timings and teacher notes retained.
+https://madebymatt.uk/Lessons/Science_Teesside/Build/ — existing Made by Matt scientific artwork, where shown.
+[/Sources]</a:t>
+            </a:r>
+          </a:p>
         </p:txBody>
       </p:sp>
       <p:sp>
@@ -1075,6 +1120,15 @@
               <a:t>[/Sources]</a:t>
             </a:r>
           </a:p>
+          <a:p xmlns:a="http://schemas.openxmlformats.org/drawingml/2006/main">
+            <a:r>
+              <a:t>
+[Sources]
+https://madebymatt.uk/Lessons/Science_Teesside/Teaching_Packs/BUILD/ — original lesson text, timings and teacher notes retained.
+https://madebymatt.uk/Lessons/Science_Teesside/Build/ — existing Made by Matt scientific artwork, where shown.
+[/Sources]</a:t>
+            </a:r>
+          </a:p>
         </p:txBody>
       </p:sp>
       <p:sp>
@@ -1190,6 +1244,15 @@
               <a:t>[/Sources]</a:t>
             </a:r>
           </a:p>
+          <a:p xmlns:a="http://schemas.openxmlformats.org/drawingml/2006/main">
+            <a:r>
+              <a:t>
+[Sources]
+https://madebymatt.uk/Lessons/Science_Teesside/Teaching_Packs/BUILD/ — original lesson text, timings and teacher notes retained.
+https://madebymatt.uk/Lessons/Science_Teesside/Build/ — existing Made by Matt scientific artwork, where shown.
+[/Sources]</a:t>
+            </a:r>
+          </a:p>
         </p:txBody>
       </p:sp>
       <p:sp>
@@ -1305,6 +1368,15 @@
               <a:t>[/Sources]</a:t>
             </a:r>
           </a:p>
+          <a:p xmlns:a="http://schemas.openxmlformats.org/drawingml/2006/main">
+            <a:r>
+              <a:t>
+[Sources]
+https://madebymatt.uk/Lessons/Science_Teesside/Teaching_Packs/BUILD/ — original lesson text, timings and teacher notes retained.
+https://madebymatt.uk/Lessons/Science_Teesside/Build/ — existing Made by Matt scientific artwork, where shown.
+[/Sources]</a:t>
+            </a:r>
+          </a:p>
         </p:txBody>
       </p:sp>
       <p:sp>
@@ -1420,6 +1492,15 @@
               <a:t>[/Sources]</a:t>
             </a:r>
           </a:p>
+          <a:p xmlns:a="http://schemas.openxmlformats.org/drawingml/2006/main">
+            <a:r>
+              <a:t>
+[Sources]
+https://madebymatt.uk/Lessons/Science_Teesside/Teaching_Packs/BUILD/ — original lesson text, timings and teacher notes retained.
+https://madebymatt.uk/Lessons/Science_Teesside/Build/ — existing Made by Matt scientific artwork, where shown.
+[/Sources]</a:t>
+            </a:r>
+          </a:p>
         </p:txBody>
       </p:sp>
       <p:sp>
@@ -1535,6 +1616,15 @@
               <a:t>[/Sources]</a:t>
             </a:r>
           </a:p>
+          <a:p xmlns:a="http://schemas.openxmlformats.org/drawingml/2006/main">
+            <a:r>
+              <a:t>
+[Sources]
+https://madebymatt.uk/Lessons/Science_Teesside/Teaching_Packs/BUILD/ — original lesson text, timings and teacher notes retained.
+https://madebymatt.uk/Lessons/Science_Teesside/Build/ — existing Made by Matt scientific artwork, where shown.
+[/Sources]</a:t>
+            </a:r>
+          </a:p>
         </p:txBody>
       </p:sp>
       <p:sp>
@@ -1648,6 +1738,15 @@
           <a:p xmlns:a="http://schemas.openxmlformats.org/drawingml/2006/main">
             <a:r>
               <a:t>[/Sources]</a:t>
+            </a:r>
+          </a:p>
+          <a:p xmlns:a="http://schemas.openxmlformats.org/drawingml/2006/main">
+            <a:r>
+              <a:t>
+[Sources]
+https://madebymatt.uk/Lessons/Science_Teesside/Teaching_Packs/BUILD/ — original lesson text, timings and teacher notes retained.
+https://madebymatt.uk/Lessons/Science_Teesside/Build/ — existing Made by Matt scientific artwork, where shown.
+[/Sources]</a:t>
             </a:r>
           </a:p>
         </p:txBody>
@@ -1715,7 +1814,7 @@
   </p:cSld>
   <p:clrMap bg1="lt1" tx1="dk1" bg2="lt2" tx2="dk2" accent1="accent1" accent2="accent2" accent3="accent3" accent4="accent4" accent5="accent5" accent6="accent6" hlink="hlink" folHlink="folHlink"/>
   <p:sldLayoutIdLst>
-    <p:sldLayoutId xmlns:r="http://schemas.openxmlformats.org/officeDocument/2006/relationships" id="2147483649" r:id="R52704c5718be4504"/>
+    <p:sldLayoutId xmlns:r="http://schemas.openxmlformats.org/officeDocument/2006/relationships" id="2147483649" r:id="Rb5f822210b0c42b9"/>
   </p:sldLayoutIdLst>
   <p:txStyles>
     <p:titleStyle>
@@ -2248,7 +2347,7 @@
     <p:bg>
       <p:bgPr>
         <a:solidFill xmlns:a="http://schemas.openxmlformats.org/drawingml/2006/main">
-          <a:srgbClr val="F5F1E8"/>
+          <a:srgbClr val="FBF9F3"/>
         </a:solidFill>
       </p:bgPr>
     </p:bg>
@@ -2277,8 +2376,8 @@
         </p:nvSpPr>
         <p:spPr>
           <a:xfrm xmlns:a="http://schemas.openxmlformats.org/drawingml/2006/main">
-            <a:off x="609600" y="552450"/>
-            <a:ext cx="781050" cy="57150"/>
+            <a:off x="609600" y="742950"/>
+            <a:ext cx="9906000" cy="38100"/>
           </a:xfrm>
           <a:prstGeom xmlns:a="http://schemas.openxmlformats.org/drawingml/2006/main" prst="rect">
             <a:avLst/>
@@ -2308,8 +2407,8 @@
         </p:nvSpPr>
         <p:spPr>
           <a:xfrm xmlns:a="http://schemas.openxmlformats.org/drawingml/2006/main">
-            <a:off x="609600" y="762000"/>
-            <a:ext cx="9334500" cy="285750"/>
+            <a:off x="609600" y="342900"/>
+            <a:ext cx="9334500" cy="266700"/>
           </a:xfrm>
           <a:prstGeom xmlns:a="http://schemas.openxmlformats.org/drawingml/2006/main" prst="rect">
             <a:avLst/>
@@ -2321,21 +2420,30 @@
           </a:ln>
         </p:spPr>
         <p:txBody>
-          <a:bodyPr xmlns:a="http://schemas.openxmlformats.org/drawingml/2006/main" lIns="0" tIns="0" rIns="0" bIns="0" anchor="ctr"/>
+          <a:bodyPr xmlns:a="http://schemas.openxmlformats.org/drawingml/2006/main" wrap="square" lIns="0" tIns="0" rIns="0" bIns="0" anchor="ctr">
+            <a:noAutofit/>
+          </a:bodyPr>
           <a:lstStyle xmlns:a="http://schemas.openxmlformats.org/drawingml/2006/main"/>
           <a:p xmlns:a="http://schemas.openxmlformats.org/drawingml/2006/main">
             <a:pPr>
-              <a:defRPr sz="1500" b="1">
+              <a:buNone/>
+              <a:defRPr sz="1425" b="1">
                 <a:solidFill>
                   <a:srgbClr val="28685E"/>
                 </a:solidFill>
+                <a:latin typeface="Arial"/>
+                <a:ea typeface="Arial"/>
+                <a:cs typeface="Arial"/>
               </a:defRPr>
             </a:pPr>
             <a:r>
-              <a:rPr sz="1500" b="1">
+              <a:rPr sz="1425" b="1">
                 <a:solidFill>
                   <a:srgbClr val="28685E"/>
                 </a:solidFill>
+                <a:latin typeface="Arial"/>
+                <a:ea typeface="Arial"/>
+                <a:cs typeface="Arial"/>
               </a:rPr>
               <a:t>MADE BY MATT  /  BUILD SCIENCE</a:t>
             </a:r>
@@ -2344,14 +2452,14 @@
       </p:sp>
       <p:pic>
         <p:nvPicPr>
-          <p:cNvPr id="12" name=""/>
+          <p:cNvPr id="15" name=""/>
           <p:cNvPicPr>
             <a:picLocks xmlns:a="http://schemas.openxmlformats.org/drawingml/2006/main" noChangeAspect="1"/>
           </p:cNvPicPr>
           <p:nvPr/>
         </p:nvPicPr>
         <p:blipFill>
-          <a:blip xmlns:r="http://schemas.openxmlformats.org/officeDocument/2006/relationships" xmlns:a="http://schemas.openxmlformats.org/drawingml/2006/main" r:embed="Rdeee0ac910bb40d1"/>
+          <a:blip xmlns:r="http://schemas.openxmlformats.org/officeDocument/2006/relationships" xmlns:a="http://schemas.openxmlformats.org/drawingml/2006/main" r:embed="Rd26f4d7788dd4e2b"/>
           <a:stretch xmlns:a="http://schemas.openxmlformats.org/drawingml/2006/main"/>
         </p:blipFill>
         <p:spPr>
@@ -2380,8 +2488,8 @@
         </p:nvSpPr>
         <p:spPr>
           <a:xfrm xmlns:a="http://schemas.openxmlformats.org/drawingml/2006/main">
-            <a:off x="609600" y="1352550"/>
-            <a:ext cx="10972800" cy="952500"/>
+            <a:off x="609600" y="1047750"/>
+            <a:ext cx="10972800" cy="895350"/>
           </a:xfrm>
           <a:prstGeom xmlns:a="http://schemas.openxmlformats.org/drawingml/2006/main" prst="rect">
             <a:avLst/>
@@ -2393,21 +2501,30 @@
           </a:ln>
         </p:spPr>
         <p:txBody>
-          <a:bodyPr xmlns:a="http://schemas.openxmlformats.org/drawingml/2006/main" lIns="0" tIns="0" rIns="0" bIns="0" anchor="ctr"/>
+          <a:bodyPr xmlns:a="http://schemas.openxmlformats.org/drawingml/2006/main" wrap="square" lIns="0" tIns="0" rIns="0" bIns="0" anchor="ctr">
+            <a:noAutofit/>
+          </a:bodyPr>
           <a:lstStyle xmlns:a="http://schemas.openxmlformats.org/drawingml/2006/main"/>
           <a:p xmlns:a="http://schemas.openxmlformats.org/drawingml/2006/main">
             <a:pPr>
-              <a:defRPr sz="3750" b="1">
+              <a:buNone/>
+              <a:defRPr sz="3600" b="1">
                 <a:solidFill>
                   <a:srgbClr val="152B3A"/>
                 </a:solidFill>
+                <a:latin typeface="Arial"/>
+                <a:ea typeface="Arial"/>
+                <a:cs typeface="Arial"/>
               </a:defRPr>
             </a:pPr>
             <a:r>
-              <a:rPr sz="3750" b="1">
+              <a:rPr sz="3600" b="1">
                 <a:solidFill>
                   <a:srgbClr val="152B3A"/>
                 </a:solidFill>
+                <a:latin typeface="Arial"/>
+                <a:ea typeface="Arial"/>
+                <a:cs typeface="Arial"/>
               </a:rPr>
               <a:t>Building a balanced plate</a:t>
             </a:r>
@@ -2474,21 +2591,30 @@
           </a:ln>
         </p:spPr>
         <p:txBody>
-          <a:bodyPr xmlns:a="http://schemas.openxmlformats.org/drawingml/2006/main" lIns="0" tIns="0" rIns="0" bIns="0" anchor="ctr"/>
+          <a:bodyPr xmlns:a="http://schemas.openxmlformats.org/drawingml/2006/main" wrap="square" lIns="0" tIns="0" rIns="0" bIns="0" anchor="ctr">
+            <a:noAutofit/>
+          </a:bodyPr>
           <a:lstStyle xmlns:a="http://schemas.openxmlformats.org/drawingml/2006/main"/>
           <a:p xmlns:a="http://schemas.openxmlformats.org/drawingml/2006/main">
             <a:pPr>
-              <a:defRPr sz="1275" b="0">
+              <a:buNone/>
+              <a:defRPr sz="1200" b="0">
                 <a:solidFill>
                   <a:srgbClr val="50616B"/>
                 </a:solidFill>
+                <a:latin typeface="Arial"/>
+                <a:ea typeface="Arial"/>
+                <a:cs typeface="Arial"/>
               </a:defRPr>
             </a:pPr>
             <a:r>
-              <a:rPr sz="1275" b="0">
+              <a:rPr sz="1200" b="0">
                 <a:solidFill>
                   <a:srgbClr val="50616B"/>
                 </a:solidFill>
+                <a:latin typeface="Arial"/>
+                <a:ea typeface="Arial"/>
+                <a:cs typeface="Arial"/>
               </a:rPr>
               <a:t>AUTUMN 1  ·  WEEK 6  ·  LESSON A</a:t>
             </a:r>
@@ -2524,14 +2650,20 @@
           </a:ln>
         </p:spPr>
         <p:txBody>
-          <a:bodyPr xmlns:a="http://schemas.openxmlformats.org/drawingml/2006/main" lIns="0" tIns="0" rIns="0" bIns="0" anchor="ctr"/>
+          <a:bodyPr xmlns:a="http://schemas.openxmlformats.org/drawingml/2006/main" wrap="square" lIns="0" tIns="0" rIns="0" bIns="0" anchor="ctr">
+            <a:noAutofit/>
+          </a:bodyPr>
           <a:lstStyle xmlns:a="http://schemas.openxmlformats.org/drawingml/2006/main"/>
           <a:p xmlns:a="http://schemas.openxmlformats.org/drawingml/2006/main">
             <a:pPr>
+              <a:buNone/>
               <a:defRPr sz="1350" b="1">
                 <a:solidFill>
                   <a:srgbClr val="28685E"/>
                 </a:solidFill>
+                <a:latin typeface="Arial"/>
+                <a:ea typeface="Arial"/>
+                <a:cs typeface="Arial"/>
               </a:defRPr>
             </a:pPr>
             <a:r>
@@ -2539,6 +2671,9 @@
                 <a:solidFill>
                   <a:srgbClr val="28685E"/>
                 </a:solidFill>
+                <a:latin typeface="Arial"/>
+                <a:ea typeface="Arial"/>
+                <a:cs typeface="Arial"/>
               </a:rPr>
               <a:t>01</a:t>
             </a:r>
@@ -2561,8 +2696,8 @@
         </p:nvSpPr>
         <p:spPr>
           <a:xfrm xmlns:a="http://schemas.openxmlformats.org/drawingml/2006/main">
-            <a:off x="609600" y="2809875"/>
-            <a:ext cx="10668000" cy="1000125"/>
+            <a:off x="609600" y="2400300"/>
+            <a:ext cx="6191250" cy="1409700"/>
           </a:xfrm>
           <a:prstGeom xmlns:a="http://schemas.openxmlformats.org/drawingml/2006/main" prst="rect">
             <a:avLst/>
@@ -2574,21 +2709,30 @@
           </a:ln>
         </p:spPr>
         <p:txBody>
-          <a:bodyPr xmlns:a="http://schemas.openxmlformats.org/drawingml/2006/main" lIns="0" tIns="0" rIns="0" bIns="0" anchor="ctr"/>
+          <a:bodyPr xmlns:a="http://schemas.openxmlformats.org/drawingml/2006/main" wrap="square" lIns="0" tIns="0" rIns="0" bIns="0" anchor="ctr">
+            <a:noAutofit/>
+          </a:bodyPr>
           <a:lstStyle xmlns:a="http://schemas.openxmlformats.org/drawingml/2006/main"/>
           <a:p xmlns:a="http://schemas.openxmlformats.org/drawingml/2006/main">
             <a:pPr>
-              <a:defRPr sz="3900" b="1">
+              <a:buNone/>
+              <a:defRPr sz="3450" b="1">
                 <a:solidFill>
                   <a:srgbClr val="28685E"/>
                 </a:solidFill>
+                <a:latin typeface="Arial"/>
+                <a:ea typeface="Arial"/>
+                <a:cs typeface="Arial"/>
               </a:defRPr>
             </a:pPr>
             <a:r>
-              <a:rPr sz="3900" b="1">
+              <a:rPr sz="3450" b="1">
                 <a:solidFill>
                   <a:srgbClr val="28685E"/>
                 </a:solidFill>
+                <a:latin typeface="Arial"/>
+                <a:ea typeface="Arial"/>
+                <a:cs typeface="Arial"/>
               </a:rPr>
               <a:t>Different foods. A shared set of groups.</a:t>
             </a:r>
@@ -2611,8 +2755,8 @@
         </p:nvSpPr>
         <p:spPr>
           <a:xfrm xmlns:a="http://schemas.openxmlformats.org/drawingml/2006/main">
-            <a:off x="609600" y="4143375"/>
-            <a:ext cx="10668000" cy="1143000"/>
+            <a:off x="609600" y="4286250"/>
+            <a:ext cx="6667500" cy="1314450"/>
           </a:xfrm>
           <a:prstGeom xmlns:a="http://schemas.openxmlformats.org/drawingml/2006/main" prst="rect">
             <a:avLst/>
@@ -2624,27 +2768,58 @@
           </a:ln>
         </p:spPr>
         <p:txBody>
-          <a:bodyPr xmlns:a="http://schemas.openxmlformats.org/drawingml/2006/main" lIns="0" tIns="0" rIns="0" bIns="0" anchor="ctr"/>
+          <a:bodyPr xmlns:a="http://schemas.openxmlformats.org/drawingml/2006/main" wrap="square" lIns="0" tIns="0" rIns="0" bIns="0" anchor="ctr">
+            <a:noAutofit/>
+          </a:bodyPr>
           <a:lstStyle xmlns:a="http://schemas.openxmlformats.org/drawingml/2006/main"/>
           <a:p xmlns:a="http://schemas.openxmlformats.org/drawingml/2006/main">
             <a:pPr>
-              <a:defRPr sz="2550" b="0">
+              <a:buNone/>
+              <a:defRPr sz="2400" b="0">
                 <a:solidFill>
                   <a:srgbClr val="152B3A"/>
                 </a:solidFill>
+                <a:latin typeface="Arial"/>
+                <a:ea typeface="Arial"/>
+                <a:cs typeface="Arial"/>
               </a:defRPr>
             </a:pPr>
             <a:r>
-              <a:rPr sz="2550" b="0">
+              <a:rPr sz="2400" b="0">
                 <a:solidFill>
                   <a:srgbClr val="152B3A"/>
                 </a:solidFill>
+                <a:latin typeface="Arial"/>
+                <a:ea typeface="Arial"/>
+                <a:cs typeface="Arial"/>
               </a:rPr>
               <a:t>I can sort foods and explain what this model can show.</a:t>
             </a:r>
           </a:p>
         </p:txBody>
       </p:sp>
+      <p:pic>
+        <p:nvPicPr>
+          <p:cNvPr id="22" name=""/>
+          <p:cNvPicPr>
+            <a:picLocks xmlns:a="http://schemas.openxmlformats.org/drawingml/2006/main" noChangeAspect="1"/>
+          </p:cNvPicPr>
+          <p:nvPr/>
+        </p:nvPicPr>
+        <p:blipFill>
+          <a:blip xmlns:r="http://schemas.openxmlformats.org/officeDocument/2006/relationships" xmlns:a="http://schemas.openxmlformats.org/drawingml/2006/main" r:embed="Rf71ce8c70fe1479b"/>
+          <a:stretch xmlns:a="http://schemas.openxmlformats.org/drawingml/2006/main"/>
+        </p:blipFill>
+        <p:spPr>
+          <a:xfrm xmlns:a="http://schemas.openxmlformats.org/drawingml/2006/main">
+            <a:off x="7620000" y="2578298"/>
+            <a:ext cx="3714750" cy="2368153"/>
+          </a:xfrm>
+          <a:prstGeom xmlns:a="http://schemas.openxmlformats.org/drawingml/2006/main" prst="rect">
+            <a:avLst/>
+          </a:prstGeom>
+        </p:spPr>
+      </p:pic>
     </p:spTree>
     <p:extLst>
       <p:ext uri="{BB962C8B-B14F-4D97-AF65-F5344CB8AC3E}">
@@ -2661,7 +2836,7 @@
     <p:bg>
       <p:bgPr>
         <a:solidFill xmlns:a="http://schemas.openxmlformats.org/drawingml/2006/main">
-          <a:srgbClr val="F5F1E8"/>
+          <a:srgbClr val="FBF9F3"/>
         </a:solidFill>
       </p:bgPr>
     </p:bg>
@@ -2690,8 +2865,8 @@
         </p:nvSpPr>
         <p:spPr>
           <a:xfrm xmlns:a="http://schemas.openxmlformats.org/drawingml/2006/main">
-            <a:off x="609600" y="552450"/>
-            <a:ext cx="781050" cy="57150"/>
+            <a:off x="609600" y="742950"/>
+            <a:ext cx="9906000" cy="38100"/>
           </a:xfrm>
           <a:prstGeom xmlns:a="http://schemas.openxmlformats.org/drawingml/2006/main" prst="rect">
             <a:avLst/>
@@ -2721,8 +2896,8 @@
         </p:nvSpPr>
         <p:spPr>
           <a:xfrm xmlns:a="http://schemas.openxmlformats.org/drawingml/2006/main">
-            <a:off x="609600" y="762000"/>
-            <a:ext cx="9334500" cy="285750"/>
+            <a:off x="609600" y="342900"/>
+            <a:ext cx="9334500" cy="266700"/>
           </a:xfrm>
           <a:prstGeom xmlns:a="http://schemas.openxmlformats.org/drawingml/2006/main" prst="rect">
             <a:avLst/>
@@ -2734,21 +2909,30 @@
           </a:ln>
         </p:spPr>
         <p:txBody>
-          <a:bodyPr xmlns:a="http://schemas.openxmlformats.org/drawingml/2006/main" lIns="0" tIns="0" rIns="0" bIns="0" anchor="ctr"/>
+          <a:bodyPr xmlns:a="http://schemas.openxmlformats.org/drawingml/2006/main" wrap="square" lIns="0" tIns="0" rIns="0" bIns="0" anchor="ctr">
+            <a:noAutofit/>
+          </a:bodyPr>
           <a:lstStyle xmlns:a="http://schemas.openxmlformats.org/drawingml/2006/main"/>
           <a:p xmlns:a="http://schemas.openxmlformats.org/drawingml/2006/main">
             <a:pPr>
-              <a:defRPr sz="1500" b="1">
+              <a:buNone/>
+              <a:defRPr sz="1425" b="1">
                 <a:solidFill>
                   <a:srgbClr val="28685E"/>
                 </a:solidFill>
+                <a:latin typeface="Arial"/>
+                <a:ea typeface="Arial"/>
+                <a:cs typeface="Arial"/>
               </a:defRPr>
             </a:pPr>
             <a:r>
-              <a:rPr sz="1500" b="1">
+              <a:rPr sz="1425" b="1">
                 <a:solidFill>
                   <a:srgbClr val="28685E"/>
                 </a:solidFill>
+                <a:latin typeface="Arial"/>
+                <a:ea typeface="Arial"/>
+                <a:cs typeface="Arial"/>
               </a:rPr>
               <a:t>MADE BY MATT  /  BUILD SCIENCE</a:t>
             </a:r>
@@ -2757,14 +2941,14 @@
       </p:sp>
       <p:pic>
         <p:nvPicPr>
-          <p:cNvPr id="14" name=""/>
+          <p:cNvPr id="18" name=""/>
           <p:cNvPicPr>
             <a:picLocks xmlns:a="http://schemas.openxmlformats.org/drawingml/2006/main" noChangeAspect="1"/>
           </p:cNvPicPr>
           <p:nvPr/>
         </p:nvPicPr>
         <p:blipFill>
-          <a:blip xmlns:r="http://schemas.openxmlformats.org/officeDocument/2006/relationships" xmlns:a="http://schemas.openxmlformats.org/drawingml/2006/main" r:embed="R3956c137149d49a6"/>
+          <a:blip xmlns:r="http://schemas.openxmlformats.org/officeDocument/2006/relationships" xmlns:a="http://schemas.openxmlformats.org/drawingml/2006/main" r:embed="R60fec8bc069144b8"/>
           <a:stretch xmlns:a="http://schemas.openxmlformats.org/drawingml/2006/main"/>
         </p:blipFill>
         <p:spPr>
@@ -2793,8 +2977,8 @@
         </p:nvSpPr>
         <p:spPr>
           <a:xfrm xmlns:a="http://schemas.openxmlformats.org/drawingml/2006/main">
-            <a:off x="609600" y="1352550"/>
-            <a:ext cx="10972800" cy="952500"/>
+            <a:off x="609600" y="1047750"/>
+            <a:ext cx="10972800" cy="895350"/>
           </a:xfrm>
           <a:prstGeom xmlns:a="http://schemas.openxmlformats.org/drawingml/2006/main" prst="rect">
             <a:avLst/>
@@ -2806,21 +2990,30 @@
           </a:ln>
         </p:spPr>
         <p:txBody>
-          <a:bodyPr xmlns:a="http://schemas.openxmlformats.org/drawingml/2006/main" lIns="0" tIns="0" rIns="0" bIns="0" anchor="ctr"/>
+          <a:bodyPr xmlns:a="http://schemas.openxmlformats.org/drawingml/2006/main" wrap="square" lIns="0" tIns="0" rIns="0" bIns="0" anchor="ctr">
+            <a:noAutofit/>
+          </a:bodyPr>
           <a:lstStyle xmlns:a="http://schemas.openxmlformats.org/drawingml/2006/main"/>
           <a:p xmlns:a="http://schemas.openxmlformats.org/drawingml/2006/main">
             <a:pPr>
-              <a:defRPr sz="3750" b="1">
+              <a:buNone/>
+              <a:defRPr sz="3600" b="1">
                 <a:solidFill>
                   <a:srgbClr val="152B3A"/>
                 </a:solidFill>
+                <a:latin typeface="Arial"/>
+                <a:ea typeface="Arial"/>
+                <a:cs typeface="Arial"/>
               </a:defRPr>
             </a:pPr>
             <a:r>
-              <a:rPr sz="3750" b="1">
+              <a:rPr sz="3600" b="1">
                 <a:solidFill>
                   <a:srgbClr val="152B3A"/>
                 </a:solidFill>
+                <a:latin typeface="Arial"/>
+                <a:ea typeface="Arial"/>
+                <a:cs typeface="Arial"/>
               </a:rPr>
               <a:t>Which claims need improving?</a:t>
             </a:r>
@@ -2887,21 +3080,30 @@
           </a:ln>
         </p:spPr>
         <p:txBody>
-          <a:bodyPr xmlns:a="http://schemas.openxmlformats.org/drawingml/2006/main" lIns="0" tIns="0" rIns="0" bIns="0" anchor="ctr"/>
+          <a:bodyPr xmlns:a="http://schemas.openxmlformats.org/drawingml/2006/main" wrap="square" lIns="0" tIns="0" rIns="0" bIns="0" anchor="ctr">
+            <a:noAutofit/>
+          </a:bodyPr>
           <a:lstStyle xmlns:a="http://schemas.openxmlformats.org/drawingml/2006/main"/>
           <a:p xmlns:a="http://schemas.openxmlformats.org/drawingml/2006/main">
             <a:pPr>
-              <a:defRPr sz="1275" b="0">
+              <a:buNone/>
+              <a:defRPr sz="1200" b="0">
                 <a:solidFill>
                   <a:srgbClr val="50616B"/>
                 </a:solidFill>
+                <a:latin typeface="Arial"/>
+                <a:ea typeface="Arial"/>
+                <a:cs typeface="Arial"/>
               </a:defRPr>
             </a:pPr>
             <a:r>
-              <a:rPr sz="1275" b="0">
+              <a:rPr sz="1200" b="0">
                 <a:solidFill>
                   <a:srgbClr val="50616B"/>
                 </a:solidFill>
+                <a:latin typeface="Arial"/>
+                <a:ea typeface="Arial"/>
+                <a:cs typeface="Arial"/>
               </a:rPr>
               <a:t>AUTUMN 1  ·  WEEK 6  ·  LESSON A</a:t>
             </a:r>
@@ -2937,14 +3139,20 @@
           </a:ln>
         </p:spPr>
         <p:txBody>
-          <a:bodyPr xmlns:a="http://schemas.openxmlformats.org/drawingml/2006/main" lIns="0" tIns="0" rIns="0" bIns="0" anchor="ctr"/>
+          <a:bodyPr xmlns:a="http://schemas.openxmlformats.org/drawingml/2006/main" wrap="square" lIns="0" tIns="0" rIns="0" bIns="0" anchor="ctr">
+            <a:noAutofit/>
+          </a:bodyPr>
           <a:lstStyle xmlns:a="http://schemas.openxmlformats.org/drawingml/2006/main"/>
           <a:p xmlns:a="http://schemas.openxmlformats.org/drawingml/2006/main">
             <a:pPr>
+              <a:buNone/>
               <a:defRPr sz="1350" b="1">
                 <a:solidFill>
                   <a:srgbClr val="28685E"/>
                 </a:solidFill>
+                <a:latin typeface="Arial"/>
+                <a:ea typeface="Arial"/>
+                <a:cs typeface="Arial"/>
               </a:defRPr>
             </a:pPr>
             <a:r>
@@ -2952,6 +3160,9 @@
                 <a:solidFill>
                   <a:srgbClr val="28685E"/>
                 </a:solidFill>
+                <a:latin typeface="Arial"/>
+                <a:ea typeface="Arial"/>
+                <a:cs typeface="Arial"/>
               </a:rPr>
               <a:t>10</a:t>
             </a:r>
@@ -2974,8 +3185,8 @@
         </p:nvSpPr>
         <p:spPr>
           <a:xfrm xmlns:a="http://schemas.openxmlformats.org/drawingml/2006/main">
-            <a:off x="609600" y="2619375"/>
-            <a:ext cx="4953000" cy="428625"/>
+            <a:off x="609600" y="2257425"/>
+            <a:ext cx="5143500" cy="533400"/>
           </a:xfrm>
           <a:prstGeom xmlns:a="http://schemas.openxmlformats.org/drawingml/2006/main" prst="rect">
             <a:avLst/>
@@ -2987,21 +3198,30 @@
           </a:ln>
         </p:spPr>
         <p:txBody>
-          <a:bodyPr xmlns:a="http://schemas.openxmlformats.org/drawingml/2006/main" lIns="0" tIns="0" rIns="0" bIns="0" anchor="ctr"/>
+          <a:bodyPr xmlns:a="http://schemas.openxmlformats.org/drawingml/2006/main" wrap="square" lIns="0" tIns="0" rIns="0" bIns="0" anchor="ctr">
+            <a:noAutofit/>
+          </a:bodyPr>
           <a:lstStyle xmlns:a="http://schemas.openxmlformats.org/drawingml/2006/main"/>
           <a:p xmlns:a="http://schemas.openxmlformats.org/drawingml/2006/main">
             <a:pPr>
-              <a:defRPr sz="2025" b="1">
+              <a:buNone/>
+              <a:defRPr sz="2100" b="1">
                 <a:solidFill>
                   <a:srgbClr val="28685E"/>
                 </a:solidFill>
+                <a:latin typeface="Arial"/>
+                <a:ea typeface="Arial"/>
+                <a:cs typeface="Arial"/>
               </a:defRPr>
             </a:pPr>
             <a:r>
-              <a:rPr sz="2025" b="1">
+              <a:rPr sz="2100" b="1">
                 <a:solidFill>
                   <a:srgbClr val="28685E"/>
                 </a:solidFill>
+                <a:latin typeface="Arial"/>
+                <a:ea typeface="Arial"/>
+                <a:cs typeface="Arial"/>
               </a:rPr>
               <a:t>READ THE CLAIM</a:t>
             </a:r>
@@ -3024,8 +3244,8 @@
         </p:nvSpPr>
         <p:spPr>
           <a:xfrm xmlns:a="http://schemas.openxmlformats.org/drawingml/2006/main">
-            <a:off x="6572250" y="2619375"/>
-            <a:ext cx="4953000" cy="428625"/>
+            <a:off x="6572250" y="2257425"/>
+            <a:ext cx="5010150" cy="533400"/>
           </a:xfrm>
           <a:prstGeom xmlns:a="http://schemas.openxmlformats.org/drawingml/2006/main" prst="rect">
             <a:avLst/>
@@ -3037,21 +3257,30 @@
           </a:ln>
         </p:spPr>
         <p:txBody>
-          <a:bodyPr xmlns:a="http://schemas.openxmlformats.org/drawingml/2006/main" lIns="0" tIns="0" rIns="0" bIns="0" anchor="ctr"/>
+          <a:bodyPr xmlns:a="http://schemas.openxmlformats.org/drawingml/2006/main" wrap="square" lIns="0" tIns="0" rIns="0" bIns="0" anchor="ctr">
+            <a:noAutofit/>
+          </a:bodyPr>
           <a:lstStyle xmlns:a="http://schemas.openxmlformats.org/drawingml/2006/main"/>
           <a:p xmlns:a="http://schemas.openxmlformats.org/drawingml/2006/main">
             <a:pPr>
-              <a:defRPr sz="2025" b="1">
+              <a:buNone/>
+              <a:defRPr sz="2100" b="1">
                 <a:solidFill>
                   <a:srgbClr val="A65D25"/>
                 </a:solidFill>
+                <a:latin typeface="Arial"/>
+                <a:ea typeface="Arial"/>
+                <a:cs typeface="Arial"/>
               </a:defRPr>
             </a:pPr>
             <a:r>
-              <a:rPr sz="2025" b="1">
+              <a:rPr sz="2100" b="1">
                 <a:solidFill>
                   <a:srgbClr val="A65D25"/>
                 </a:solidFill>
+                <a:latin typeface="Arial"/>
+                <a:ea typeface="Arial"/>
+                <a:cs typeface="Arial"/>
               </a:rPr>
               <a:t>TEST IT WITH THE MODEL</a:t>
             </a:r>
@@ -3074,8 +3303,8 @@
         </p:nvSpPr>
         <p:spPr>
           <a:xfrm xmlns:a="http://schemas.openxmlformats.org/drawingml/2006/main">
-            <a:off x="609600" y="3333750"/>
-            <a:ext cx="4953000" cy="2524125"/>
+            <a:off x="609600" y="3238500"/>
+            <a:ext cx="5143500" cy="2286000"/>
           </a:xfrm>
           <a:prstGeom xmlns:a="http://schemas.openxmlformats.org/drawingml/2006/main" prst="rect">
             <a:avLst/>
@@ -3087,14 +3316,20 @@
           </a:ln>
         </p:spPr>
         <p:txBody>
-          <a:bodyPr xmlns:a="http://schemas.openxmlformats.org/drawingml/2006/main" lIns="0" tIns="0" rIns="0" bIns="0" anchor="ctr"/>
+          <a:bodyPr xmlns:a="http://schemas.openxmlformats.org/drawingml/2006/main" wrap="square" lIns="0" tIns="0" rIns="0" bIns="0" anchor="ctr">
+            <a:noAutofit/>
+          </a:bodyPr>
           <a:lstStyle xmlns:a="http://schemas.openxmlformats.org/drawingml/2006/main"/>
           <a:p xmlns:a="http://schemas.openxmlformats.org/drawingml/2006/main">
             <a:pPr>
+              <a:buNone/>
               <a:defRPr sz="2400" b="0">
                 <a:solidFill>
                   <a:srgbClr val="152B3A"/>
                 </a:solidFill>
+                <a:latin typeface="Arial"/>
+                <a:ea typeface="Arial"/>
+                <a:cs typeface="Arial"/>
               </a:defRPr>
             </a:pPr>
             <a:r>
@@ -3102,16 +3337,23 @@
                 <a:solidFill>
                   <a:srgbClr val="152B3A"/>
                 </a:solidFill>
+                <a:latin typeface="Arial"/>
+                <a:ea typeface="Arial"/>
+                <a:cs typeface="Arial"/>
               </a:rPr>
               <a:t>Some from the different groups.</a:t>
             </a:r>
           </a:p>
           <a:p xmlns:a="http://schemas.openxmlformats.org/drawingml/2006/main">
             <a:pPr>
+              <a:buNone/>
               <a:defRPr sz="2400" b="0">
                 <a:solidFill>
                   <a:srgbClr val="152B3A"/>
                 </a:solidFill>
+                <a:latin typeface="Arial"/>
+                <a:ea typeface="Arial"/>
+                <a:cs typeface="Arial"/>
               </a:defRPr>
             </a:pPr>
             <a:r>
@@ -3119,16 +3361,23 @@
                 <a:solidFill>
                   <a:srgbClr val="152B3A"/>
                 </a:solidFill>
+                <a:latin typeface="Arial"/>
+                <a:ea typeface="Arial"/>
+                <a:cs typeface="Arial"/>
               </a:rPr>
               <a:t>Only one group is needed.</a:t>
             </a:r>
           </a:p>
           <a:p xmlns:a="http://schemas.openxmlformats.org/drawingml/2006/main">
             <a:pPr>
+              <a:buNone/>
               <a:defRPr sz="2400" b="0">
                 <a:solidFill>
                   <a:srgbClr val="152B3A"/>
                 </a:solidFill>
+                <a:latin typeface="Arial"/>
+                <a:ea typeface="Arial"/>
+                <a:cs typeface="Arial"/>
               </a:defRPr>
             </a:pPr>
             <a:r>
@@ -3136,6 +3385,9 @@
                 <a:solidFill>
                   <a:srgbClr val="152B3A"/>
                 </a:solidFill>
+                <a:latin typeface="Arial"/>
+                <a:ea typeface="Arial"/>
+                <a:cs typeface="Arial"/>
               </a:rPr>
               <a:t>Sometimes foods are banned.</a:t>
             </a:r>
@@ -3158,8 +3410,8 @@
         </p:nvSpPr>
         <p:spPr>
           <a:xfrm xmlns:a="http://schemas.openxmlformats.org/drawingml/2006/main">
-            <a:off x="6572250" y="3333750"/>
-            <a:ext cx="4857750" cy="2524125"/>
+            <a:off x="6572250" y="3238500"/>
+            <a:ext cx="5010150" cy="2286000"/>
           </a:xfrm>
           <a:prstGeom xmlns:a="http://schemas.openxmlformats.org/drawingml/2006/main" prst="rect">
             <a:avLst/>
@@ -3171,14 +3423,20 @@
           </a:ln>
         </p:spPr>
         <p:txBody>
-          <a:bodyPr xmlns:a="http://schemas.openxmlformats.org/drawingml/2006/main" lIns="0" tIns="0" rIns="0" bIns="0" anchor="ctr"/>
+          <a:bodyPr xmlns:a="http://schemas.openxmlformats.org/drawingml/2006/main" wrap="square" lIns="0" tIns="0" rIns="0" bIns="0" anchor="ctr">
+            <a:noAutofit/>
+          </a:bodyPr>
           <a:lstStyle xmlns:a="http://schemas.openxmlformats.org/drawingml/2006/main"/>
           <a:p xmlns:a="http://schemas.openxmlformats.org/drawingml/2006/main">
             <a:pPr>
+              <a:buNone/>
               <a:defRPr sz="2400" b="0">
                 <a:solidFill>
                   <a:srgbClr val="152B3A"/>
                 </a:solidFill>
+                <a:latin typeface="Arial"/>
+                <a:ea typeface="Arial"/>
+                <a:cs typeface="Arial"/>
               </a:defRPr>
             </a:pPr>
             <a:r>
@@ -3186,16 +3444,23 @@
                 <a:solidFill>
                   <a:srgbClr val="152B3A"/>
                 </a:solidFill>
+                <a:latin typeface="Arial"/>
+                <a:ea typeface="Arial"/>
+                <a:cs typeface="Arial"/>
               </a:rPr>
               <a:t>What can a range provide?</a:t>
             </a:r>
           </a:p>
           <a:p xmlns:a="http://schemas.openxmlformats.org/drawingml/2006/main">
             <a:pPr>
+              <a:buNone/>
               <a:defRPr sz="2400" b="0">
                 <a:solidFill>
                   <a:srgbClr val="152B3A"/>
                 </a:solidFill>
+                <a:latin typeface="Arial"/>
+                <a:ea typeface="Arial"/>
+                <a:cs typeface="Arial"/>
               </a:defRPr>
             </a:pPr>
             <a:r>
@@ -3203,16 +3468,23 @@
                 <a:solidFill>
                   <a:srgbClr val="152B3A"/>
                 </a:solidFill>
+                <a:latin typeface="Arial"/>
+                <a:ea typeface="Arial"/>
+                <a:cs typeface="Arial"/>
               </a:rPr>
               <a:t>Does a single group show variety?</a:t>
             </a:r>
           </a:p>
           <a:p xmlns:a="http://schemas.openxmlformats.org/drawingml/2006/main">
             <a:pPr>
+              <a:buNone/>
               <a:defRPr sz="2400" b="0">
                 <a:solidFill>
                   <a:srgbClr val="152B3A"/>
                 </a:solidFill>
+                <a:latin typeface="Arial"/>
+                <a:ea typeface="Arial"/>
+                <a:cs typeface="Arial"/>
               </a:defRPr>
             </a:pPr>
             <a:r>
@@ -3220,11 +3492,76 @@
                 <a:solidFill>
                   <a:srgbClr val="152B3A"/>
                 </a:solidFill>
+                <a:latin typeface="Arial"/>
+                <a:ea typeface="Arial"/>
+                <a:cs typeface="Arial"/>
               </a:rPr>
               <a:t>Does the guide ban foods?</a:t>
             </a:r>
           </a:p>
         </p:txBody>
+      </p:sp>
+      <p:sp>
+        <p:nvSpPr>
+          <p:cNvPr id="14" name="">
+            <a:extLst xmlns:a="http://schemas.openxmlformats.org/drawingml/2006/main">
+              <a:ext uri="{FF2B5EF4-FFF2-40B4-BE49-F238E27FC236}">
+                <a16:creationId xmlns:a16="http://schemas.microsoft.com/office/drawing/2014/main" id="{82A3817B-3E28-4C53-9AFB-C32E9B4D0228}"/>
+              </a:ext>
+            </a:extLst>
+          </p:cNvPr>
+          <p:cNvSpPr>
+            <a:spLocks xmlns:a="http://schemas.openxmlformats.org/drawingml/2006/main" noGrp="1"/>
+          </p:cNvSpPr>
+          <p:nvPr/>
+        </p:nvSpPr>
+        <p:spPr>
+          <a:xfrm xmlns:a="http://schemas.openxmlformats.org/drawingml/2006/main">
+            <a:off x="609600" y="2886075"/>
+            <a:ext cx="5048250" cy="0"/>
+          </a:xfrm>
+          <a:prstGeom xmlns:a="http://schemas.openxmlformats.org/drawingml/2006/main" prst="line">
+            <a:avLst/>
+          </a:prstGeom>
+          <a:noFill xmlns:a="http://schemas.openxmlformats.org/drawingml/2006/main"/>
+          <a:ln xmlns:a="http://schemas.openxmlformats.org/drawingml/2006/main" w="28575">
+            <a:solidFill>
+              <a:srgbClr val="DCE7DD"/>
+            </a:solidFill>
+            <a:prstDash val="solid"/>
+          </a:ln>
+        </p:spPr>
+      </p:sp>
+      <p:sp>
+        <p:nvSpPr>
+          <p:cNvPr id="15" name="">
+            <a:extLst xmlns:a="http://schemas.openxmlformats.org/drawingml/2006/main">
+              <a:ext uri="{FF2B5EF4-FFF2-40B4-BE49-F238E27FC236}">
+                <a16:creationId xmlns:a16="http://schemas.microsoft.com/office/drawing/2014/main" id="{96FFBEE1-6B4A-4856-B26E-0F41AF9DFE90}"/>
+              </a:ext>
+            </a:extLst>
+          </p:cNvPr>
+          <p:cNvSpPr>
+            <a:spLocks xmlns:a="http://schemas.openxmlformats.org/drawingml/2006/main" noGrp="1"/>
+          </p:cNvSpPr>
+          <p:nvPr/>
+        </p:nvSpPr>
+        <p:spPr>
+          <a:xfrm xmlns:a="http://schemas.openxmlformats.org/drawingml/2006/main">
+            <a:off x="6572250" y="2886075"/>
+            <a:ext cx="5010150" cy="0"/>
+          </a:xfrm>
+          <a:prstGeom xmlns:a="http://schemas.openxmlformats.org/drawingml/2006/main" prst="line">
+            <a:avLst/>
+          </a:prstGeom>
+          <a:noFill xmlns:a="http://schemas.openxmlformats.org/drawingml/2006/main"/>
+          <a:ln xmlns:a="http://schemas.openxmlformats.org/drawingml/2006/main" w="28575">
+            <a:solidFill>
+              <a:srgbClr val="DCE7DD"/>
+            </a:solidFill>
+            <a:prstDash val="solid"/>
+          </a:ln>
+        </p:spPr>
       </p:sp>
     </p:spTree>
     <p:extLst>
@@ -3242,7 +3579,7 @@
     <p:bg>
       <p:bgPr>
         <a:solidFill xmlns:a="http://schemas.openxmlformats.org/drawingml/2006/main">
-          <a:srgbClr val="F5F1E8"/>
+          <a:srgbClr val="FBF9F3"/>
         </a:solidFill>
       </p:bgPr>
     </p:bg>
@@ -3271,8 +3608,8 @@
         </p:nvSpPr>
         <p:spPr>
           <a:xfrm xmlns:a="http://schemas.openxmlformats.org/drawingml/2006/main">
-            <a:off x="609600" y="552450"/>
-            <a:ext cx="781050" cy="57150"/>
+            <a:off x="609600" y="742950"/>
+            <a:ext cx="9906000" cy="38100"/>
           </a:xfrm>
           <a:prstGeom xmlns:a="http://schemas.openxmlformats.org/drawingml/2006/main" prst="rect">
             <a:avLst/>
@@ -3302,8 +3639,8 @@
         </p:nvSpPr>
         <p:spPr>
           <a:xfrm xmlns:a="http://schemas.openxmlformats.org/drawingml/2006/main">
-            <a:off x="609600" y="762000"/>
-            <a:ext cx="9334500" cy="285750"/>
+            <a:off x="609600" y="342900"/>
+            <a:ext cx="9334500" cy="266700"/>
           </a:xfrm>
           <a:prstGeom xmlns:a="http://schemas.openxmlformats.org/drawingml/2006/main" prst="rect">
             <a:avLst/>
@@ -3315,21 +3652,30 @@
           </a:ln>
         </p:spPr>
         <p:txBody>
-          <a:bodyPr xmlns:a="http://schemas.openxmlformats.org/drawingml/2006/main" lIns="0" tIns="0" rIns="0" bIns="0" anchor="ctr"/>
+          <a:bodyPr xmlns:a="http://schemas.openxmlformats.org/drawingml/2006/main" wrap="square" lIns="0" tIns="0" rIns="0" bIns="0" anchor="ctr">
+            <a:noAutofit/>
+          </a:bodyPr>
           <a:lstStyle xmlns:a="http://schemas.openxmlformats.org/drawingml/2006/main"/>
           <a:p xmlns:a="http://schemas.openxmlformats.org/drawingml/2006/main">
             <a:pPr>
-              <a:defRPr sz="1500" b="1">
+              <a:buNone/>
+              <a:defRPr sz="1425" b="1">
                 <a:solidFill>
                   <a:srgbClr val="28685E"/>
                 </a:solidFill>
+                <a:latin typeface="Arial"/>
+                <a:ea typeface="Arial"/>
+                <a:cs typeface="Arial"/>
               </a:defRPr>
             </a:pPr>
             <a:r>
-              <a:rPr sz="1500" b="1">
+              <a:rPr sz="1425" b="1">
                 <a:solidFill>
                   <a:srgbClr val="28685E"/>
                 </a:solidFill>
+                <a:latin typeface="Arial"/>
+                <a:ea typeface="Arial"/>
+                <a:cs typeface="Arial"/>
               </a:rPr>
               <a:t>MADE BY MATT  /  BUILD SCIENCE</a:t>
             </a:r>
@@ -3338,14 +3684,14 @@
       </p:sp>
       <p:pic>
         <p:nvPicPr>
-          <p:cNvPr id="14" name=""/>
+          <p:cNvPr id="16" name=""/>
           <p:cNvPicPr>
             <a:picLocks xmlns:a="http://schemas.openxmlformats.org/drawingml/2006/main" noChangeAspect="1"/>
           </p:cNvPicPr>
           <p:nvPr/>
         </p:nvPicPr>
         <p:blipFill>
-          <a:blip xmlns:r="http://schemas.openxmlformats.org/officeDocument/2006/relationships" xmlns:a="http://schemas.openxmlformats.org/drawingml/2006/main" r:embed="Ra6b4231e56694769"/>
+          <a:blip xmlns:r="http://schemas.openxmlformats.org/officeDocument/2006/relationships" xmlns:a="http://schemas.openxmlformats.org/drawingml/2006/main" r:embed="Rbbf839925fa14b7e"/>
           <a:stretch xmlns:a="http://schemas.openxmlformats.org/drawingml/2006/main"/>
         </p:blipFill>
         <p:spPr>
@@ -3374,8 +3720,8 @@
         </p:nvSpPr>
         <p:spPr>
           <a:xfrm xmlns:a="http://schemas.openxmlformats.org/drawingml/2006/main">
-            <a:off x="609600" y="1352550"/>
-            <a:ext cx="10972800" cy="952500"/>
+            <a:off x="609600" y="1047750"/>
+            <a:ext cx="10972800" cy="895350"/>
           </a:xfrm>
           <a:prstGeom xmlns:a="http://schemas.openxmlformats.org/drawingml/2006/main" prst="rect">
             <a:avLst/>
@@ -3387,21 +3733,30 @@
           </a:ln>
         </p:spPr>
         <p:txBody>
-          <a:bodyPr xmlns:a="http://schemas.openxmlformats.org/drawingml/2006/main" lIns="0" tIns="0" rIns="0" bIns="0" anchor="ctr"/>
+          <a:bodyPr xmlns:a="http://schemas.openxmlformats.org/drawingml/2006/main" wrap="square" lIns="0" tIns="0" rIns="0" bIns="0" anchor="ctr">
+            <a:noAutofit/>
+          </a:bodyPr>
           <a:lstStyle xmlns:a="http://schemas.openxmlformats.org/drawingml/2006/main"/>
           <a:p xmlns:a="http://schemas.openxmlformats.org/drawingml/2006/main">
             <a:pPr>
-              <a:defRPr sz="3750" b="1">
+              <a:buNone/>
+              <a:defRPr sz="3600" b="1">
                 <a:solidFill>
                   <a:srgbClr val="152B3A"/>
                 </a:solidFill>
+                <a:latin typeface="Arial"/>
+                <a:ea typeface="Arial"/>
+                <a:cs typeface="Arial"/>
               </a:defRPr>
             </a:pPr>
             <a:r>
-              <a:rPr sz="3750" b="1">
+              <a:rPr sz="3600" b="1">
                 <a:solidFill>
                   <a:srgbClr val="152B3A"/>
                 </a:solidFill>
+                <a:latin typeface="Arial"/>
+                <a:ea typeface="Arial"/>
+                <a:cs typeface="Arial"/>
               </a:rPr>
               <a:t>Swap within a group and save</a:t>
             </a:r>
@@ -3468,21 +3823,30 @@
           </a:ln>
         </p:spPr>
         <p:txBody>
-          <a:bodyPr xmlns:a="http://schemas.openxmlformats.org/drawingml/2006/main" lIns="0" tIns="0" rIns="0" bIns="0" anchor="ctr"/>
+          <a:bodyPr xmlns:a="http://schemas.openxmlformats.org/drawingml/2006/main" wrap="square" lIns="0" tIns="0" rIns="0" bIns="0" anchor="ctr">
+            <a:noAutofit/>
+          </a:bodyPr>
           <a:lstStyle xmlns:a="http://schemas.openxmlformats.org/drawingml/2006/main"/>
           <a:p xmlns:a="http://schemas.openxmlformats.org/drawingml/2006/main">
             <a:pPr>
-              <a:defRPr sz="1275" b="0">
+              <a:buNone/>
+              <a:defRPr sz="1200" b="0">
                 <a:solidFill>
                   <a:srgbClr val="50616B"/>
                 </a:solidFill>
+                <a:latin typeface="Arial"/>
+                <a:ea typeface="Arial"/>
+                <a:cs typeface="Arial"/>
               </a:defRPr>
             </a:pPr>
             <a:r>
-              <a:rPr sz="1275" b="0">
+              <a:rPr sz="1200" b="0">
                 <a:solidFill>
                   <a:srgbClr val="50616B"/>
                 </a:solidFill>
+                <a:latin typeface="Arial"/>
+                <a:ea typeface="Arial"/>
+                <a:cs typeface="Arial"/>
               </a:rPr>
               <a:t>AUTUMN 1  ·  WEEK 6  ·  LESSON A</a:t>
             </a:r>
@@ -3518,14 +3882,20 @@
           </a:ln>
         </p:spPr>
         <p:txBody>
-          <a:bodyPr xmlns:a="http://schemas.openxmlformats.org/drawingml/2006/main" lIns="0" tIns="0" rIns="0" bIns="0" anchor="ctr"/>
+          <a:bodyPr xmlns:a="http://schemas.openxmlformats.org/drawingml/2006/main" wrap="square" lIns="0" tIns="0" rIns="0" bIns="0" anchor="ctr">
+            <a:noAutofit/>
+          </a:bodyPr>
           <a:lstStyle xmlns:a="http://schemas.openxmlformats.org/drawingml/2006/main"/>
           <a:p xmlns:a="http://schemas.openxmlformats.org/drawingml/2006/main">
             <a:pPr>
+              <a:buNone/>
               <a:defRPr sz="1350" b="1">
                 <a:solidFill>
                   <a:srgbClr val="28685E"/>
                 </a:solidFill>
+                <a:latin typeface="Arial"/>
+                <a:ea typeface="Arial"/>
+                <a:cs typeface="Arial"/>
               </a:defRPr>
             </a:pPr>
             <a:r>
@@ -3533,6 +3903,9 @@
                 <a:solidFill>
                   <a:srgbClr val="28685E"/>
                 </a:solidFill>
+                <a:latin typeface="Arial"/>
+                <a:ea typeface="Arial"/>
+                <a:cs typeface="Arial"/>
               </a:rPr>
               <a:t>11</a:t>
             </a:r>
@@ -3555,8 +3928,8 @@
         </p:nvSpPr>
         <p:spPr>
           <a:xfrm xmlns:a="http://schemas.openxmlformats.org/drawingml/2006/main">
-            <a:off x="609600" y="2619375"/>
-            <a:ext cx="10972800" cy="714375"/>
+            <a:off x="609600" y="2305050"/>
+            <a:ext cx="10972800" cy="704850"/>
           </a:xfrm>
           <a:prstGeom xmlns:a="http://schemas.openxmlformats.org/drawingml/2006/main" prst="rect">
             <a:avLst/>
@@ -3568,14 +3941,20 @@
           </a:ln>
         </p:spPr>
         <p:txBody>
-          <a:bodyPr xmlns:a="http://schemas.openxmlformats.org/drawingml/2006/main" lIns="0" tIns="0" rIns="0" bIns="0" anchor="ctr"/>
+          <a:bodyPr xmlns:a="http://schemas.openxmlformats.org/drawingml/2006/main" wrap="square" lIns="0" tIns="0" rIns="0" bIns="0" anchor="ctr">
+            <a:noAutofit/>
+          </a:bodyPr>
           <a:lstStyle xmlns:a="http://schemas.openxmlformats.org/drawingml/2006/main"/>
           <a:p xmlns:a="http://schemas.openxmlformats.org/drawingml/2006/main">
             <a:pPr>
+              <a:buNone/>
               <a:defRPr sz="2550" b="0">
                 <a:solidFill>
                   <a:srgbClr val="152B3A"/>
                 </a:solidFill>
+                <a:latin typeface="Arial"/>
+                <a:ea typeface="Arial"/>
+                <a:cs typeface="Arial"/>
               </a:defRPr>
             </a:pPr>
             <a:r>
@@ -3583,6 +3962,9 @@
                 <a:solidFill>
                   <a:srgbClr val="152B3A"/>
                 </a:solidFill>
+                <a:latin typeface="Arial"/>
+                <a:ea typeface="Arial"/>
+                <a:cs typeface="Arial"/>
               </a:rPr>
               <a:t>Swap rice for bread.</a:t>
             </a:r>
@@ -3605,8 +3987,8 @@
         </p:nvSpPr>
         <p:spPr>
           <a:xfrm xmlns:a="http://schemas.openxmlformats.org/drawingml/2006/main">
-            <a:off x="609600" y="3409950"/>
-            <a:ext cx="10972800" cy="714375"/>
+            <a:off x="609600" y="3143250"/>
+            <a:ext cx="10972800" cy="704850"/>
           </a:xfrm>
           <a:prstGeom xmlns:a="http://schemas.openxmlformats.org/drawingml/2006/main" prst="rect">
             <a:avLst/>
@@ -3618,14 +4000,20 @@
           </a:ln>
         </p:spPr>
         <p:txBody>
-          <a:bodyPr xmlns:a="http://schemas.openxmlformats.org/drawingml/2006/main" lIns="0" tIns="0" rIns="0" bIns="0" anchor="ctr"/>
+          <a:bodyPr xmlns:a="http://schemas.openxmlformats.org/drawingml/2006/main" wrap="square" lIns="0" tIns="0" rIns="0" bIns="0" anchor="ctr">
+            <a:noAutofit/>
+          </a:bodyPr>
           <a:lstStyle xmlns:a="http://schemas.openxmlformats.org/drawingml/2006/main"/>
           <a:p xmlns:a="http://schemas.openxmlformats.org/drawingml/2006/main">
             <a:pPr>
+              <a:buNone/>
               <a:defRPr sz="2550" b="0">
                 <a:solidFill>
                   <a:srgbClr val="152B3A"/>
                 </a:solidFill>
+                <a:latin typeface="Arial"/>
+                <a:ea typeface="Arial"/>
+                <a:cs typeface="Arial"/>
               </a:defRPr>
             </a:pPr>
             <a:r>
@@ -3633,6 +4021,9 @@
                 <a:solidFill>
                   <a:srgbClr val="152B3A"/>
                 </a:solidFill>
+                <a:latin typeface="Arial"/>
+                <a:ea typeface="Arial"/>
+                <a:cs typeface="Arial"/>
               </a:rPr>
               <a:t>Swap chicken for beans.</a:t>
             </a:r>
@@ -3655,8 +4046,8 @@
         </p:nvSpPr>
         <p:spPr>
           <a:xfrm xmlns:a="http://schemas.openxmlformats.org/drawingml/2006/main">
-            <a:off x="609600" y="4200525"/>
-            <a:ext cx="10972800" cy="714375"/>
+            <a:off x="609600" y="3981450"/>
+            <a:ext cx="10972800" cy="704850"/>
           </a:xfrm>
           <a:prstGeom xmlns:a="http://schemas.openxmlformats.org/drawingml/2006/main" prst="rect">
             <a:avLst/>
@@ -3668,14 +4059,20 @@
           </a:ln>
         </p:spPr>
         <p:txBody>
-          <a:bodyPr xmlns:a="http://schemas.openxmlformats.org/drawingml/2006/main" lIns="0" tIns="0" rIns="0" bIns="0" anchor="ctr"/>
+          <a:bodyPr xmlns:a="http://schemas.openxmlformats.org/drawingml/2006/main" wrap="square" lIns="0" tIns="0" rIns="0" bIns="0" anchor="ctr">
+            <a:noAutofit/>
+          </a:bodyPr>
           <a:lstStyle xmlns:a="http://schemas.openxmlformats.org/drawingml/2006/main"/>
           <a:p xmlns:a="http://schemas.openxmlformats.org/drawingml/2006/main">
             <a:pPr>
+              <a:buNone/>
               <a:defRPr sz="2550" b="0">
                 <a:solidFill>
                   <a:srgbClr val="152B3A"/>
                 </a:solidFill>
+                <a:latin typeface="Arial"/>
+                <a:ea typeface="Arial"/>
+                <a:cs typeface="Arial"/>
               </a:defRPr>
             </a:pPr>
             <a:r>
@@ -3683,6 +4080,9 @@
                 <a:solidFill>
                   <a:srgbClr val="152B3A"/>
                 </a:solidFill>
+                <a:latin typeface="Arial"/>
+                <a:ea typeface="Arial"/>
+                <a:cs typeface="Arial"/>
               </a:rPr>
               <a:t>Explain why the broad group still fits.</a:t>
             </a:r>
@@ -3705,8 +4105,8 @@
         </p:nvSpPr>
         <p:spPr>
           <a:xfrm xmlns:a="http://schemas.openxmlformats.org/drawingml/2006/main">
-            <a:off x="609600" y="4991100"/>
-            <a:ext cx="10972800" cy="714375"/>
+            <a:off x="609600" y="4819650"/>
+            <a:ext cx="10972800" cy="704850"/>
           </a:xfrm>
           <a:prstGeom xmlns:a="http://schemas.openxmlformats.org/drawingml/2006/main" prst="rect">
             <a:avLst/>
@@ -3718,21 +4118,30 @@
           </a:ln>
         </p:spPr>
         <p:txBody>
-          <a:bodyPr xmlns:a="http://schemas.openxmlformats.org/drawingml/2006/main" lIns="0" tIns="0" rIns="0" bIns="0" anchor="ctr"/>
+          <a:bodyPr xmlns:a="http://schemas.openxmlformats.org/drawingml/2006/main" wrap="square" lIns="0" tIns="0" rIns="0" bIns="0" anchor="ctr">
+            <a:noAutofit/>
+          </a:bodyPr>
           <a:lstStyle xmlns:a="http://schemas.openxmlformats.org/drawingml/2006/main"/>
           <a:p xmlns:a="http://schemas.openxmlformats.org/drawingml/2006/main">
             <a:pPr>
-              <a:defRPr sz="2550" b="0">
-                <a:solidFill>
-                  <a:srgbClr val="152B3A"/>
-                </a:solidFill>
+              <a:buNone/>
+              <a:defRPr sz="2550" b="1">
+                <a:solidFill>
+                  <a:srgbClr val="28685E"/>
+                </a:solidFill>
+                <a:latin typeface="Arial"/>
+                <a:ea typeface="Arial"/>
+                <a:cs typeface="Arial"/>
               </a:defRPr>
             </a:pPr>
             <a:r>
-              <a:rPr sz="2550" b="0">
-                <a:solidFill>
-                  <a:srgbClr val="152B3A"/>
-                </a:solidFill>
+              <a:rPr sz="2550" b="1">
+                <a:solidFill>
+                  <a:srgbClr val="28685E"/>
+                </a:solidFill>
+                <a:latin typeface="Arial"/>
+                <a:ea typeface="Arial"/>
+                <a:cs typeface="Arial"/>
               </a:rPr>
               <a:t>Save the labelled cards for Wednesday.</a:t>
             </a:r>
@@ -3755,7 +4164,7 @@
     <p:bg>
       <p:bgPr>
         <a:solidFill xmlns:a="http://schemas.openxmlformats.org/drawingml/2006/main">
-          <a:srgbClr val="F5F1E8"/>
+          <a:srgbClr val="FBF9F3"/>
         </a:solidFill>
       </p:bgPr>
     </p:bg>
@@ -3784,8 +4193,8 @@
         </p:nvSpPr>
         <p:spPr>
           <a:xfrm xmlns:a="http://schemas.openxmlformats.org/drawingml/2006/main">
-            <a:off x="609600" y="552450"/>
-            <a:ext cx="781050" cy="57150"/>
+            <a:off x="609600" y="742950"/>
+            <a:ext cx="9906000" cy="38100"/>
           </a:xfrm>
           <a:prstGeom xmlns:a="http://schemas.openxmlformats.org/drawingml/2006/main" prst="rect">
             <a:avLst/>
@@ -3815,8 +4224,8 @@
         </p:nvSpPr>
         <p:spPr>
           <a:xfrm xmlns:a="http://schemas.openxmlformats.org/drawingml/2006/main">
-            <a:off x="609600" y="762000"/>
-            <a:ext cx="9334500" cy="285750"/>
+            <a:off x="609600" y="342900"/>
+            <a:ext cx="9334500" cy="266700"/>
           </a:xfrm>
           <a:prstGeom xmlns:a="http://schemas.openxmlformats.org/drawingml/2006/main" prst="rect">
             <a:avLst/>
@@ -3828,21 +4237,30 @@
           </a:ln>
         </p:spPr>
         <p:txBody>
-          <a:bodyPr xmlns:a="http://schemas.openxmlformats.org/drawingml/2006/main" lIns="0" tIns="0" rIns="0" bIns="0" anchor="ctr"/>
+          <a:bodyPr xmlns:a="http://schemas.openxmlformats.org/drawingml/2006/main" wrap="square" lIns="0" tIns="0" rIns="0" bIns="0" anchor="ctr">
+            <a:noAutofit/>
+          </a:bodyPr>
           <a:lstStyle xmlns:a="http://schemas.openxmlformats.org/drawingml/2006/main"/>
           <a:p xmlns:a="http://schemas.openxmlformats.org/drawingml/2006/main">
             <a:pPr>
-              <a:defRPr sz="1500" b="1">
+              <a:buNone/>
+              <a:defRPr sz="1425" b="1">
                 <a:solidFill>
                   <a:srgbClr val="28685E"/>
                 </a:solidFill>
+                <a:latin typeface="Arial"/>
+                <a:ea typeface="Arial"/>
+                <a:cs typeface="Arial"/>
               </a:defRPr>
             </a:pPr>
             <a:r>
-              <a:rPr sz="1500" b="1">
+              <a:rPr sz="1425" b="1">
                 <a:solidFill>
                   <a:srgbClr val="28685E"/>
                 </a:solidFill>
+                <a:latin typeface="Arial"/>
+                <a:ea typeface="Arial"/>
+                <a:cs typeface="Arial"/>
               </a:rPr>
               <a:t>MADE BY MATT  /  BUILD SCIENCE</a:t>
             </a:r>
@@ -3851,14 +4269,14 @@
       </p:sp>
       <p:pic>
         <p:nvPicPr>
-          <p:cNvPr id="13" name=""/>
+          <p:cNvPr id="15" name=""/>
           <p:cNvPicPr>
             <a:picLocks xmlns:a="http://schemas.openxmlformats.org/drawingml/2006/main" noChangeAspect="1"/>
           </p:cNvPicPr>
           <p:nvPr/>
         </p:nvPicPr>
         <p:blipFill>
-          <a:blip xmlns:r="http://schemas.openxmlformats.org/officeDocument/2006/relationships" xmlns:a="http://schemas.openxmlformats.org/drawingml/2006/main" r:embed="Rf65feeacc56b4d0f"/>
+          <a:blip xmlns:r="http://schemas.openxmlformats.org/officeDocument/2006/relationships" xmlns:a="http://schemas.openxmlformats.org/drawingml/2006/main" r:embed="Rf25e86c22e3a4a34"/>
           <a:stretch xmlns:a="http://schemas.openxmlformats.org/drawingml/2006/main"/>
         </p:blipFill>
         <p:spPr>
@@ -3887,8 +4305,8 @@
         </p:nvSpPr>
         <p:spPr>
           <a:xfrm xmlns:a="http://schemas.openxmlformats.org/drawingml/2006/main">
-            <a:off x="609600" y="1352550"/>
-            <a:ext cx="10972800" cy="952500"/>
+            <a:off x="609600" y="1047750"/>
+            <a:ext cx="10972800" cy="895350"/>
           </a:xfrm>
           <a:prstGeom xmlns:a="http://schemas.openxmlformats.org/drawingml/2006/main" prst="rect">
             <a:avLst/>
@@ -3900,21 +4318,30 @@
           </a:ln>
         </p:spPr>
         <p:txBody>
-          <a:bodyPr xmlns:a="http://schemas.openxmlformats.org/drawingml/2006/main" lIns="0" tIns="0" rIns="0" bIns="0" anchor="ctr"/>
+          <a:bodyPr xmlns:a="http://schemas.openxmlformats.org/drawingml/2006/main" wrap="square" lIns="0" tIns="0" rIns="0" bIns="0" anchor="ctr">
+            <a:noAutofit/>
+          </a:bodyPr>
           <a:lstStyle xmlns:a="http://schemas.openxmlformats.org/drawingml/2006/main"/>
           <a:p xmlns:a="http://schemas.openxmlformats.org/drawingml/2006/main">
             <a:pPr>
-              <a:defRPr sz="3750" b="1">
+              <a:buNone/>
+              <a:defRPr sz="3600" b="1">
                 <a:solidFill>
                   <a:srgbClr val="152B3A"/>
                 </a:solidFill>
+                <a:latin typeface="Arial"/>
+                <a:ea typeface="Arial"/>
+                <a:cs typeface="Arial"/>
               </a:defRPr>
             </a:pPr>
             <a:r>
-              <a:rPr sz="3750" b="1">
+              <a:rPr sz="3600" b="1">
                 <a:solidFill>
                   <a:srgbClr val="152B3A"/>
                 </a:solidFill>
+                <a:latin typeface="Arial"/>
+                <a:ea typeface="Arial"/>
+                <a:cs typeface="Arial"/>
               </a:rPr>
               <a:t>Retrieve a food-job idea</a:t>
             </a:r>
@@ -3981,21 +4408,30 @@
           </a:ln>
         </p:spPr>
         <p:txBody>
-          <a:bodyPr xmlns:a="http://schemas.openxmlformats.org/drawingml/2006/main" lIns="0" tIns="0" rIns="0" bIns="0" anchor="ctr"/>
+          <a:bodyPr xmlns:a="http://schemas.openxmlformats.org/drawingml/2006/main" wrap="square" lIns="0" tIns="0" rIns="0" bIns="0" anchor="ctr">
+            <a:noAutofit/>
+          </a:bodyPr>
           <a:lstStyle xmlns:a="http://schemas.openxmlformats.org/drawingml/2006/main"/>
           <a:p xmlns:a="http://schemas.openxmlformats.org/drawingml/2006/main">
             <a:pPr>
-              <a:defRPr sz="1275" b="0">
+              <a:buNone/>
+              <a:defRPr sz="1200" b="0">
                 <a:solidFill>
                   <a:srgbClr val="50616B"/>
                 </a:solidFill>
+                <a:latin typeface="Arial"/>
+                <a:ea typeface="Arial"/>
+                <a:cs typeface="Arial"/>
               </a:defRPr>
             </a:pPr>
             <a:r>
-              <a:rPr sz="1275" b="0">
+              <a:rPr sz="1200" b="0">
                 <a:solidFill>
                   <a:srgbClr val="50616B"/>
                 </a:solidFill>
+                <a:latin typeface="Arial"/>
+                <a:ea typeface="Arial"/>
+                <a:cs typeface="Arial"/>
               </a:rPr>
               <a:t>AUTUMN 1  ·  WEEK 6  ·  LESSON A</a:t>
             </a:r>
@@ -4031,14 +4467,20 @@
           </a:ln>
         </p:spPr>
         <p:txBody>
-          <a:bodyPr xmlns:a="http://schemas.openxmlformats.org/drawingml/2006/main" lIns="0" tIns="0" rIns="0" bIns="0" anchor="ctr"/>
+          <a:bodyPr xmlns:a="http://schemas.openxmlformats.org/drawingml/2006/main" wrap="square" lIns="0" tIns="0" rIns="0" bIns="0" anchor="ctr">
+            <a:noAutofit/>
+          </a:bodyPr>
           <a:lstStyle xmlns:a="http://schemas.openxmlformats.org/drawingml/2006/main"/>
           <a:p xmlns:a="http://schemas.openxmlformats.org/drawingml/2006/main">
             <a:pPr>
+              <a:buNone/>
               <a:defRPr sz="1350" b="1">
                 <a:solidFill>
                   <a:srgbClr val="28685E"/>
                 </a:solidFill>
+                <a:latin typeface="Arial"/>
+                <a:ea typeface="Arial"/>
+                <a:cs typeface="Arial"/>
               </a:defRPr>
             </a:pPr>
             <a:r>
@@ -4046,6 +4488,9 @@
                 <a:solidFill>
                   <a:srgbClr val="28685E"/>
                 </a:solidFill>
+                <a:latin typeface="Arial"/>
+                <a:ea typeface="Arial"/>
+                <a:cs typeface="Arial"/>
               </a:rPr>
               <a:t>02</a:t>
             </a:r>
@@ -4068,8 +4513,8 @@
         </p:nvSpPr>
         <p:spPr>
           <a:xfrm xmlns:a="http://schemas.openxmlformats.org/drawingml/2006/main">
-            <a:off x="609600" y="2619375"/>
-            <a:ext cx="10972800" cy="781050"/>
+            <a:off x="609600" y="2305050"/>
+            <a:ext cx="10972800" cy="914400"/>
           </a:xfrm>
           <a:prstGeom xmlns:a="http://schemas.openxmlformats.org/drawingml/2006/main" prst="rect">
             <a:avLst/>
@@ -4081,14 +4526,20 @@
           </a:ln>
         </p:spPr>
         <p:txBody>
-          <a:bodyPr xmlns:a="http://schemas.openxmlformats.org/drawingml/2006/main" lIns="0" tIns="0" rIns="0" bIns="0" anchor="ctr"/>
+          <a:bodyPr xmlns:a="http://schemas.openxmlformats.org/drawingml/2006/main" wrap="square" lIns="0" tIns="0" rIns="0" bIns="0" anchor="ctr">
+            <a:noAutofit/>
+          </a:bodyPr>
           <a:lstStyle xmlns:a="http://schemas.openxmlformats.org/drawingml/2006/main"/>
           <a:p xmlns:a="http://schemas.openxmlformats.org/drawingml/2006/main">
             <a:pPr>
+              <a:buNone/>
               <a:defRPr sz="2550" b="0">
                 <a:solidFill>
                   <a:srgbClr val="152B3A"/>
                 </a:solidFill>
+                <a:latin typeface="Arial"/>
+                <a:ea typeface="Arial"/>
+                <a:cs typeface="Arial"/>
               </a:defRPr>
             </a:pPr>
             <a:r>
@@ -4096,6 +4547,9 @@
                 <a:solidFill>
                   <a:srgbClr val="152B3A"/>
                 </a:solidFill>
+                <a:latin typeface="Arial"/>
+                <a:ea typeface="Arial"/>
+                <a:cs typeface="Arial"/>
               </a:rPr>
               <a:t>Name or point to a food from last week.</a:t>
             </a:r>
@@ -4118,8 +4572,8 @@
         </p:nvSpPr>
         <p:spPr>
           <a:xfrm xmlns:a="http://schemas.openxmlformats.org/drawingml/2006/main">
-            <a:off x="609600" y="3476625"/>
-            <a:ext cx="10972800" cy="781050"/>
+            <a:off x="609600" y="3352800"/>
+            <a:ext cx="10972800" cy="914400"/>
           </a:xfrm>
           <a:prstGeom xmlns:a="http://schemas.openxmlformats.org/drawingml/2006/main" prst="rect">
             <a:avLst/>
@@ -4131,14 +4585,20 @@
           </a:ln>
         </p:spPr>
         <p:txBody>
-          <a:bodyPr xmlns:a="http://schemas.openxmlformats.org/drawingml/2006/main" lIns="0" tIns="0" rIns="0" bIns="0" anchor="ctr"/>
+          <a:bodyPr xmlns:a="http://schemas.openxmlformats.org/drawingml/2006/main" wrap="square" lIns="0" tIns="0" rIns="0" bIns="0" anchor="ctr">
+            <a:noAutofit/>
+          </a:bodyPr>
           <a:lstStyle xmlns:a="http://schemas.openxmlformats.org/drawingml/2006/main"/>
           <a:p xmlns:a="http://schemas.openxmlformats.org/drawingml/2006/main">
             <a:pPr>
+              <a:buNone/>
               <a:defRPr sz="2550" b="0">
                 <a:solidFill>
                   <a:srgbClr val="152B3A"/>
                 </a:solidFill>
+                <a:latin typeface="Arial"/>
+                <a:ea typeface="Arial"/>
+                <a:cs typeface="Arial"/>
               </a:defRPr>
             </a:pPr>
             <a:r>
@@ -4146,6 +4606,9 @@
                 <a:solidFill>
                   <a:srgbClr val="152B3A"/>
                 </a:solidFill>
+                <a:latin typeface="Arial"/>
+                <a:ea typeface="Arial"/>
+                <a:cs typeface="Arial"/>
               </a:rPr>
               <a:t>What can it provide for a body?</a:t>
             </a:r>
@@ -4168,8 +4631,8 @@
         </p:nvSpPr>
         <p:spPr>
           <a:xfrm xmlns:a="http://schemas.openxmlformats.org/drawingml/2006/main">
-            <a:off x="609600" y="4333875"/>
-            <a:ext cx="10972800" cy="781050"/>
+            <a:off x="609600" y="4400550"/>
+            <a:ext cx="10972800" cy="914400"/>
           </a:xfrm>
           <a:prstGeom xmlns:a="http://schemas.openxmlformats.org/drawingml/2006/main" prst="rect">
             <a:avLst/>
@@ -4181,21 +4644,30 @@
           </a:ln>
         </p:spPr>
         <p:txBody>
-          <a:bodyPr xmlns:a="http://schemas.openxmlformats.org/drawingml/2006/main" lIns="0" tIns="0" rIns="0" bIns="0" anchor="ctr"/>
+          <a:bodyPr xmlns:a="http://schemas.openxmlformats.org/drawingml/2006/main" wrap="square" lIns="0" tIns="0" rIns="0" bIns="0" anchor="ctr">
+            <a:noAutofit/>
+          </a:bodyPr>
           <a:lstStyle xmlns:a="http://schemas.openxmlformats.org/drawingml/2006/main"/>
           <a:p xmlns:a="http://schemas.openxmlformats.org/drawingml/2006/main">
             <a:pPr>
-              <a:defRPr sz="2550" b="0">
-                <a:solidFill>
-                  <a:srgbClr val="152B3A"/>
-                </a:solidFill>
+              <a:buNone/>
+              <a:defRPr sz="2550" b="1">
+                <a:solidFill>
+                  <a:srgbClr val="28685E"/>
+                </a:solidFill>
+                <a:latin typeface="Arial"/>
+                <a:ea typeface="Arial"/>
+                <a:cs typeface="Arial"/>
               </a:defRPr>
             </a:pPr>
             <a:r>
-              <a:rPr sz="2550" b="0">
-                <a:solidFill>
-                  <a:srgbClr val="152B3A"/>
-                </a:solidFill>
+              <a:rPr sz="2550" b="1">
+                <a:solidFill>
+                  <a:srgbClr val="28685E"/>
+                </a:solidFill>
+                <a:latin typeface="Arial"/>
+                <a:ea typeface="Arial"/>
+                <a:cs typeface="Arial"/>
               </a:rPr>
               <a:t>Now we will group example foods.</a:t>
             </a:r>
@@ -4218,7 +4690,7 @@
     <p:bg>
       <p:bgPr>
         <a:solidFill xmlns:a="http://schemas.openxmlformats.org/drawingml/2006/main">
-          <a:srgbClr val="F5F1E8"/>
+          <a:srgbClr val="FBF9F3"/>
         </a:solidFill>
       </p:bgPr>
     </p:bg>
@@ -4247,8 +4719,8 @@
         </p:nvSpPr>
         <p:spPr>
           <a:xfrm xmlns:a="http://schemas.openxmlformats.org/drawingml/2006/main">
-            <a:off x="609600" y="552450"/>
-            <a:ext cx="781050" cy="57150"/>
+            <a:off x="609600" y="742950"/>
+            <a:ext cx="9906000" cy="38100"/>
           </a:xfrm>
           <a:prstGeom xmlns:a="http://schemas.openxmlformats.org/drawingml/2006/main" prst="rect">
             <a:avLst/>
@@ -4278,8 +4750,8 @@
         </p:nvSpPr>
         <p:spPr>
           <a:xfrm xmlns:a="http://schemas.openxmlformats.org/drawingml/2006/main">
-            <a:off x="609600" y="762000"/>
-            <a:ext cx="9334500" cy="285750"/>
+            <a:off x="609600" y="342900"/>
+            <a:ext cx="9334500" cy="266700"/>
           </a:xfrm>
           <a:prstGeom xmlns:a="http://schemas.openxmlformats.org/drawingml/2006/main" prst="rect">
             <a:avLst/>
@@ -4291,21 +4763,30 @@
           </a:ln>
         </p:spPr>
         <p:txBody>
-          <a:bodyPr xmlns:a="http://schemas.openxmlformats.org/drawingml/2006/main" lIns="0" tIns="0" rIns="0" bIns="0" anchor="ctr"/>
+          <a:bodyPr xmlns:a="http://schemas.openxmlformats.org/drawingml/2006/main" wrap="square" lIns="0" tIns="0" rIns="0" bIns="0" anchor="ctr">
+            <a:noAutofit/>
+          </a:bodyPr>
           <a:lstStyle xmlns:a="http://schemas.openxmlformats.org/drawingml/2006/main"/>
           <a:p xmlns:a="http://schemas.openxmlformats.org/drawingml/2006/main">
             <a:pPr>
-              <a:defRPr sz="1500" b="1">
+              <a:buNone/>
+              <a:defRPr sz="1425" b="1">
                 <a:solidFill>
                   <a:srgbClr val="28685E"/>
                 </a:solidFill>
+                <a:latin typeface="Arial"/>
+                <a:ea typeface="Arial"/>
+                <a:cs typeface="Arial"/>
               </a:defRPr>
             </a:pPr>
             <a:r>
-              <a:rPr sz="1500" b="1">
+              <a:rPr sz="1425" b="1">
                 <a:solidFill>
                   <a:srgbClr val="28685E"/>
                 </a:solidFill>
+                <a:latin typeface="Arial"/>
+                <a:ea typeface="Arial"/>
+                <a:cs typeface="Arial"/>
               </a:rPr>
               <a:t>MADE BY MATT  /  BUILD SCIENCE</a:t>
             </a:r>
@@ -4314,14 +4795,14 @@
       </p:sp>
       <p:pic>
         <p:nvPicPr>
-          <p:cNvPr id="13" name=""/>
+          <p:cNvPr id="15" name=""/>
           <p:cNvPicPr>
             <a:picLocks xmlns:a="http://schemas.openxmlformats.org/drawingml/2006/main" noChangeAspect="1"/>
           </p:cNvPicPr>
           <p:nvPr/>
         </p:nvPicPr>
         <p:blipFill>
-          <a:blip xmlns:r="http://schemas.openxmlformats.org/officeDocument/2006/relationships" xmlns:a="http://schemas.openxmlformats.org/drawingml/2006/main" r:embed="Rf7187f8bf82a4000"/>
+          <a:blip xmlns:r="http://schemas.openxmlformats.org/officeDocument/2006/relationships" xmlns:a="http://schemas.openxmlformats.org/drawingml/2006/main" r:embed="Rf249783ee9f9434b"/>
           <a:stretch xmlns:a="http://schemas.openxmlformats.org/drawingml/2006/main"/>
         </p:blipFill>
         <p:spPr>
@@ -4350,8 +4831,8 @@
         </p:nvSpPr>
         <p:spPr>
           <a:xfrm xmlns:a="http://schemas.openxmlformats.org/drawingml/2006/main">
-            <a:off x="609600" y="1352550"/>
-            <a:ext cx="10972800" cy="952500"/>
+            <a:off x="609600" y="1047750"/>
+            <a:ext cx="10972800" cy="895350"/>
           </a:xfrm>
           <a:prstGeom xmlns:a="http://schemas.openxmlformats.org/drawingml/2006/main" prst="rect">
             <a:avLst/>
@@ -4363,21 +4844,30 @@
           </a:ln>
         </p:spPr>
         <p:txBody>
-          <a:bodyPr xmlns:a="http://schemas.openxmlformats.org/drawingml/2006/main" lIns="0" tIns="0" rIns="0" bIns="0" anchor="ctr"/>
+          <a:bodyPr xmlns:a="http://schemas.openxmlformats.org/drawingml/2006/main" wrap="square" lIns="0" tIns="0" rIns="0" bIns="0" anchor="ctr">
+            <a:noAutofit/>
+          </a:bodyPr>
           <a:lstStyle xmlns:a="http://schemas.openxmlformats.org/drawingml/2006/main"/>
           <a:p xmlns:a="http://schemas.openxmlformats.org/drawingml/2006/main">
             <a:pPr>
-              <a:defRPr sz="3750" b="1">
+              <a:buNone/>
+              <a:defRPr sz="3600" b="1">
                 <a:solidFill>
                   <a:srgbClr val="152B3A"/>
                 </a:solidFill>
+                <a:latin typeface="Arial"/>
+                <a:ea typeface="Arial"/>
+                <a:cs typeface="Arial"/>
               </a:defRPr>
             </a:pPr>
             <a:r>
-              <a:rPr sz="3750" b="1">
+              <a:rPr sz="3600" b="1">
                 <a:solidFill>
                   <a:srgbClr val="152B3A"/>
                 </a:solidFill>
+                <a:latin typeface="Arial"/>
+                <a:ea typeface="Arial"/>
+                <a:cs typeface="Arial"/>
               </a:rPr>
               <a:t>Three things we will do</a:t>
             </a:r>
@@ -4444,21 +4934,30 @@
           </a:ln>
         </p:spPr>
         <p:txBody>
-          <a:bodyPr xmlns:a="http://schemas.openxmlformats.org/drawingml/2006/main" lIns="0" tIns="0" rIns="0" bIns="0" anchor="ctr"/>
+          <a:bodyPr xmlns:a="http://schemas.openxmlformats.org/drawingml/2006/main" wrap="square" lIns="0" tIns="0" rIns="0" bIns="0" anchor="ctr">
+            <a:noAutofit/>
+          </a:bodyPr>
           <a:lstStyle xmlns:a="http://schemas.openxmlformats.org/drawingml/2006/main"/>
           <a:p xmlns:a="http://schemas.openxmlformats.org/drawingml/2006/main">
             <a:pPr>
-              <a:defRPr sz="1275" b="0">
+              <a:buNone/>
+              <a:defRPr sz="1200" b="0">
                 <a:solidFill>
                   <a:srgbClr val="50616B"/>
                 </a:solidFill>
+                <a:latin typeface="Arial"/>
+                <a:ea typeface="Arial"/>
+                <a:cs typeface="Arial"/>
               </a:defRPr>
             </a:pPr>
             <a:r>
-              <a:rPr sz="1275" b="0">
+              <a:rPr sz="1200" b="0">
                 <a:solidFill>
                   <a:srgbClr val="50616B"/>
                 </a:solidFill>
+                <a:latin typeface="Arial"/>
+                <a:ea typeface="Arial"/>
+                <a:cs typeface="Arial"/>
               </a:rPr>
               <a:t>AUTUMN 1  ·  WEEK 6  ·  LESSON A</a:t>
             </a:r>
@@ -4494,14 +4993,20 @@
           </a:ln>
         </p:spPr>
         <p:txBody>
-          <a:bodyPr xmlns:a="http://schemas.openxmlformats.org/drawingml/2006/main" lIns="0" tIns="0" rIns="0" bIns="0" anchor="ctr"/>
+          <a:bodyPr xmlns:a="http://schemas.openxmlformats.org/drawingml/2006/main" wrap="square" lIns="0" tIns="0" rIns="0" bIns="0" anchor="ctr">
+            <a:noAutofit/>
+          </a:bodyPr>
           <a:lstStyle xmlns:a="http://schemas.openxmlformats.org/drawingml/2006/main"/>
           <a:p xmlns:a="http://schemas.openxmlformats.org/drawingml/2006/main">
             <a:pPr>
+              <a:buNone/>
               <a:defRPr sz="1350" b="1">
                 <a:solidFill>
                   <a:srgbClr val="28685E"/>
                 </a:solidFill>
+                <a:latin typeface="Arial"/>
+                <a:ea typeface="Arial"/>
+                <a:cs typeface="Arial"/>
               </a:defRPr>
             </a:pPr>
             <a:r>
@@ -4509,6 +5014,9 @@
                 <a:solidFill>
                   <a:srgbClr val="28685E"/>
                 </a:solidFill>
+                <a:latin typeface="Arial"/>
+                <a:ea typeface="Arial"/>
+                <a:cs typeface="Arial"/>
               </a:rPr>
               <a:t>03</a:t>
             </a:r>
@@ -4531,8 +5039,8 @@
         </p:nvSpPr>
         <p:spPr>
           <a:xfrm xmlns:a="http://schemas.openxmlformats.org/drawingml/2006/main">
-            <a:off x="609600" y="2619375"/>
-            <a:ext cx="10972800" cy="781050"/>
+            <a:off x="609600" y="2305050"/>
+            <a:ext cx="10972800" cy="914400"/>
           </a:xfrm>
           <a:prstGeom xmlns:a="http://schemas.openxmlformats.org/drawingml/2006/main" prst="rect">
             <a:avLst/>
@@ -4544,14 +5052,20 @@
           </a:ln>
         </p:spPr>
         <p:txBody>
-          <a:bodyPr xmlns:a="http://schemas.openxmlformats.org/drawingml/2006/main" lIns="0" tIns="0" rIns="0" bIns="0" anchor="ctr"/>
+          <a:bodyPr xmlns:a="http://schemas.openxmlformats.org/drawingml/2006/main" wrap="square" lIns="0" tIns="0" rIns="0" bIns="0" anchor="ctr">
+            <a:noAutofit/>
+          </a:bodyPr>
           <a:lstStyle xmlns:a="http://schemas.openxmlformats.org/drawingml/2006/main"/>
           <a:p xmlns:a="http://schemas.openxmlformats.org/drawingml/2006/main">
             <a:pPr>
+              <a:buNone/>
               <a:defRPr sz="2550" b="0">
                 <a:solidFill>
                   <a:srgbClr val="152B3A"/>
                 </a:solidFill>
+                <a:latin typeface="Arial"/>
+                <a:ea typeface="Arial"/>
+                <a:cs typeface="Arial"/>
               </a:defRPr>
             </a:pPr>
             <a:r>
@@ -4559,6 +5073,9 @@
                 <a:solidFill>
                   <a:srgbClr val="152B3A"/>
                 </a:solidFill>
+                <a:latin typeface="Arial"/>
+                <a:ea typeface="Arial"/>
+                <a:cs typeface="Arial"/>
               </a:rPr>
               <a:t>Name the broad food groups.</a:t>
             </a:r>
@@ -4581,8 +5098,8 @@
         </p:nvSpPr>
         <p:spPr>
           <a:xfrm xmlns:a="http://schemas.openxmlformats.org/drawingml/2006/main">
-            <a:off x="609600" y="3476625"/>
-            <a:ext cx="10972800" cy="781050"/>
+            <a:off x="609600" y="3352800"/>
+            <a:ext cx="10972800" cy="914400"/>
           </a:xfrm>
           <a:prstGeom xmlns:a="http://schemas.openxmlformats.org/drawingml/2006/main" prst="rect">
             <a:avLst/>
@@ -4594,14 +5111,20 @@
           </a:ln>
         </p:spPr>
         <p:txBody>
-          <a:bodyPr xmlns:a="http://schemas.openxmlformats.org/drawingml/2006/main" lIns="0" tIns="0" rIns="0" bIns="0" anchor="ctr"/>
+          <a:bodyPr xmlns:a="http://schemas.openxmlformats.org/drawingml/2006/main" wrap="square" lIns="0" tIns="0" rIns="0" bIns="0" anchor="ctr">
+            <a:noAutofit/>
+          </a:bodyPr>
           <a:lstStyle xmlns:a="http://schemas.openxmlformats.org/drawingml/2006/main"/>
           <a:p xmlns:a="http://schemas.openxmlformats.org/drawingml/2006/main">
             <a:pPr>
+              <a:buNone/>
               <a:defRPr sz="2550" b="0">
                 <a:solidFill>
                   <a:srgbClr val="152B3A"/>
                 </a:solidFill>
+                <a:latin typeface="Arial"/>
+                <a:ea typeface="Arial"/>
+                <a:cs typeface="Arial"/>
               </a:defRPr>
             </a:pPr>
             <a:r>
@@ -4609,6 +5132,9 @@
                 <a:solidFill>
                   <a:srgbClr val="152B3A"/>
                 </a:solidFill>
+                <a:latin typeface="Arial"/>
+                <a:ea typeface="Arial"/>
+                <a:cs typeface="Arial"/>
               </a:rPr>
               <a:t>Sort eight example cards.</a:t>
             </a:r>
@@ -4631,8 +5157,8 @@
         </p:nvSpPr>
         <p:spPr>
           <a:xfrm xmlns:a="http://schemas.openxmlformats.org/drawingml/2006/main">
-            <a:off x="609600" y="4333875"/>
-            <a:ext cx="10972800" cy="781050"/>
+            <a:off x="609600" y="4400550"/>
+            <a:ext cx="10972800" cy="914400"/>
           </a:xfrm>
           <a:prstGeom xmlns:a="http://schemas.openxmlformats.org/drawingml/2006/main" prst="rect">
             <a:avLst/>
@@ -4644,21 +5170,30 @@
           </a:ln>
         </p:spPr>
         <p:txBody>
-          <a:bodyPr xmlns:a="http://schemas.openxmlformats.org/drawingml/2006/main" lIns="0" tIns="0" rIns="0" bIns="0" anchor="ctr"/>
+          <a:bodyPr xmlns:a="http://schemas.openxmlformats.org/drawingml/2006/main" wrap="square" lIns="0" tIns="0" rIns="0" bIns="0" anchor="ctr">
+            <a:noAutofit/>
+          </a:bodyPr>
           <a:lstStyle xmlns:a="http://schemas.openxmlformats.org/drawingml/2006/main"/>
           <a:p xmlns:a="http://schemas.openxmlformats.org/drawingml/2006/main">
             <a:pPr>
-              <a:defRPr sz="2550" b="0">
-                <a:solidFill>
-                  <a:srgbClr val="152B3A"/>
-                </a:solidFill>
+              <a:buNone/>
+              <a:defRPr sz="2550" b="1">
+                <a:solidFill>
+                  <a:srgbClr val="28685E"/>
+                </a:solidFill>
+                <a:latin typeface="Arial"/>
+                <a:ea typeface="Arial"/>
+                <a:cs typeface="Arial"/>
               </a:defRPr>
             </a:pPr>
             <a:r>
-              <a:rPr sz="2550" b="0">
-                <a:solidFill>
-                  <a:srgbClr val="152B3A"/>
-                </a:solidFill>
+              <a:rPr sz="2550" b="1">
+                <a:solidFill>
+                  <a:srgbClr val="28685E"/>
+                </a:solidFill>
+                <a:latin typeface="Arial"/>
+                <a:ea typeface="Arial"/>
+                <a:cs typeface="Arial"/>
               </a:rPr>
               <a:t>Explain balance over a day or week.</a:t>
             </a:r>
@@ -4681,7 +5216,7 @@
     <p:bg>
       <p:bgPr>
         <a:solidFill xmlns:a="http://schemas.openxmlformats.org/drawingml/2006/main">
-          <a:srgbClr val="F5F1E8"/>
+          <a:srgbClr val="FBF9F3"/>
         </a:solidFill>
       </p:bgPr>
     </p:bg>
@@ -4710,8 +5245,8 @@
         </p:nvSpPr>
         <p:spPr>
           <a:xfrm xmlns:a="http://schemas.openxmlformats.org/drawingml/2006/main">
-            <a:off x="609600" y="552450"/>
-            <a:ext cx="781050" cy="57150"/>
+            <a:off x="609600" y="742950"/>
+            <a:ext cx="9906000" cy="38100"/>
           </a:xfrm>
           <a:prstGeom xmlns:a="http://schemas.openxmlformats.org/drawingml/2006/main" prst="rect">
             <a:avLst/>
@@ -4741,8 +5276,8 @@
         </p:nvSpPr>
         <p:spPr>
           <a:xfrm xmlns:a="http://schemas.openxmlformats.org/drawingml/2006/main">
-            <a:off x="609600" y="762000"/>
-            <a:ext cx="9334500" cy="285750"/>
+            <a:off x="609600" y="342900"/>
+            <a:ext cx="9334500" cy="266700"/>
           </a:xfrm>
           <a:prstGeom xmlns:a="http://schemas.openxmlformats.org/drawingml/2006/main" prst="rect">
             <a:avLst/>
@@ -4754,21 +5289,30 @@
           </a:ln>
         </p:spPr>
         <p:txBody>
-          <a:bodyPr xmlns:a="http://schemas.openxmlformats.org/drawingml/2006/main" lIns="0" tIns="0" rIns="0" bIns="0" anchor="ctr"/>
+          <a:bodyPr xmlns:a="http://schemas.openxmlformats.org/drawingml/2006/main" wrap="square" lIns="0" tIns="0" rIns="0" bIns="0" anchor="ctr">
+            <a:noAutofit/>
+          </a:bodyPr>
           <a:lstStyle xmlns:a="http://schemas.openxmlformats.org/drawingml/2006/main"/>
           <a:p xmlns:a="http://schemas.openxmlformats.org/drawingml/2006/main">
             <a:pPr>
-              <a:defRPr sz="1500" b="1">
+              <a:buNone/>
+              <a:defRPr sz="1425" b="1">
                 <a:solidFill>
                   <a:srgbClr val="28685E"/>
                 </a:solidFill>
+                <a:latin typeface="Arial"/>
+                <a:ea typeface="Arial"/>
+                <a:cs typeface="Arial"/>
               </a:defRPr>
             </a:pPr>
             <a:r>
-              <a:rPr sz="1500" b="1">
+              <a:rPr sz="1425" b="1">
                 <a:solidFill>
                   <a:srgbClr val="28685E"/>
                 </a:solidFill>
+                <a:latin typeface="Arial"/>
+                <a:ea typeface="Arial"/>
+                <a:cs typeface="Arial"/>
               </a:rPr>
               <a:t>MADE BY MATT  /  BUILD SCIENCE</a:t>
             </a:r>
@@ -4777,14 +5321,14 @@
       </p:sp>
       <p:pic>
         <p:nvPicPr>
-          <p:cNvPr id="14" name=""/>
+          <p:cNvPr id="20" name=""/>
           <p:cNvPicPr>
             <a:picLocks xmlns:a="http://schemas.openxmlformats.org/drawingml/2006/main" noChangeAspect="1"/>
           </p:cNvPicPr>
           <p:nvPr/>
         </p:nvPicPr>
         <p:blipFill>
-          <a:blip xmlns:r="http://schemas.openxmlformats.org/officeDocument/2006/relationships" xmlns:a="http://schemas.openxmlformats.org/drawingml/2006/main" r:embed="Rf4923ea5d2624dea"/>
+          <a:blip xmlns:r="http://schemas.openxmlformats.org/officeDocument/2006/relationships" xmlns:a="http://schemas.openxmlformats.org/drawingml/2006/main" r:embed="R3105865a79e9494d"/>
           <a:stretch xmlns:a="http://schemas.openxmlformats.org/drawingml/2006/main"/>
         </p:blipFill>
         <p:spPr>
@@ -4813,8 +5357,8 @@
         </p:nvSpPr>
         <p:spPr>
           <a:xfrm xmlns:a="http://schemas.openxmlformats.org/drawingml/2006/main">
-            <a:off x="609600" y="1352550"/>
-            <a:ext cx="10972800" cy="952500"/>
+            <a:off x="609600" y="1047750"/>
+            <a:ext cx="10972800" cy="895350"/>
           </a:xfrm>
           <a:prstGeom xmlns:a="http://schemas.openxmlformats.org/drawingml/2006/main" prst="rect">
             <a:avLst/>
@@ -4826,21 +5370,30 @@
           </a:ln>
         </p:spPr>
         <p:txBody>
-          <a:bodyPr xmlns:a="http://schemas.openxmlformats.org/drawingml/2006/main" lIns="0" tIns="0" rIns="0" bIns="0" anchor="ctr"/>
+          <a:bodyPr xmlns:a="http://schemas.openxmlformats.org/drawingml/2006/main" wrap="square" lIns="0" tIns="0" rIns="0" bIns="0" anchor="ctr">
+            <a:noAutofit/>
+          </a:bodyPr>
           <a:lstStyle xmlns:a="http://schemas.openxmlformats.org/drawingml/2006/main"/>
           <a:p xmlns:a="http://schemas.openxmlformats.org/drawingml/2006/main">
             <a:pPr>
-              <a:defRPr sz="3750" b="1">
+              <a:buNone/>
+              <a:defRPr sz="3600" b="1">
                 <a:solidFill>
                   <a:srgbClr val="152B3A"/>
                 </a:solidFill>
+                <a:latin typeface="Arial"/>
+                <a:ea typeface="Arial"/>
+                <a:cs typeface="Arial"/>
               </a:defRPr>
             </a:pPr>
             <a:r>
-              <a:rPr sz="3750" b="1">
+              <a:rPr sz="3600" b="1">
                 <a:solidFill>
                   <a:srgbClr val="152B3A"/>
                 </a:solidFill>
+                <a:latin typeface="Arial"/>
+                <a:ea typeface="Arial"/>
+                <a:cs typeface="Arial"/>
               </a:rPr>
               <a:t>Five broad food groups</a:t>
             </a:r>
@@ -4907,21 +5460,30 @@
           </a:ln>
         </p:spPr>
         <p:txBody>
-          <a:bodyPr xmlns:a="http://schemas.openxmlformats.org/drawingml/2006/main" lIns="0" tIns="0" rIns="0" bIns="0" anchor="ctr"/>
+          <a:bodyPr xmlns:a="http://schemas.openxmlformats.org/drawingml/2006/main" wrap="square" lIns="0" tIns="0" rIns="0" bIns="0" anchor="ctr">
+            <a:noAutofit/>
+          </a:bodyPr>
           <a:lstStyle xmlns:a="http://schemas.openxmlformats.org/drawingml/2006/main"/>
           <a:p xmlns:a="http://schemas.openxmlformats.org/drawingml/2006/main">
             <a:pPr>
-              <a:defRPr sz="1275" b="0">
+              <a:buNone/>
+              <a:defRPr sz="1200" b="0">
                 <a:solidFill>
                   <a:srgbClr val="50616B"/>
                 </a:solidFill>
+                <a:latin typeface="Arial"/>
+                <a:ea typeface="Arial"/>
+                <a:cs typeface="Arial"/>
               </a:defRPr>
             </a:pPr>
             <a:r>
-              <a:rPr sz="1275" b="0">
+              <a:rPr sz="1200" b="0">
                 <a:solidFill>
                   <a:srgbClr val="50616B"/>
                 </a:solidFill>
+                <a:latin typeface="Arial"/>
+                <a:ea typeface="Arial"/>
+                <a:cs typeface="Arial"/>
               </a:rPr>
               <a:t>AUTUMN 1  ·  WEEK 6  ·  LESSON A</a:t>
             </a:r>
@@ -4957,14 +5519,20 @@
           </a:ln>
         </p:spPr>
         <p:txBody>
-          <a:bodyPr xmlns:a="http://schemas.openxmlformats.org/drawingml/2006/main" lIns="0" tIns="0" rIns="0" bIns="0" anchor="ctr"/>
+          <a:bodyPr xmlns:a="http://schemas.openxmlformats.org/drawingml/2006/main" wrap="square" lIns="0" tIns="0" rIns="0" bIns="0" anchor="ctr">
+            <a:noAutofit/>
+          </a:bodyPr>
           <a:lstStyle xmlns:a="http://schemas.openxmlformats.org/drawingml/2006/main"/>
           <a:p xmlns:a="http://schemas.openxmlformats.org/drawingml/2006/main">
             <a:pPr>
+              <a:buNone/>
               <a:defRPr sz="1350" b="1">
                 <a:solidFill>
                   <a:srgbClr val="28685E"/>
                 </a:solidFill>
+                <a:latin typeface="Arial"/>
+                <a:ea typeface="Arial"/>
+                <a:cs typeface="Arial"/>
               </a:defRPr>
             </a:pPr>
             <a:r>
@@ -4972,6 +5540,9 @@
                 <a:solidFill>
                   <a:srgbClr val="28685E"/>
                 </a:solidFill>
+                <a:latin typeface="Arial"/>
+                <a:ea typeface="Arial"/>
+                <a:cs typeface="Arial"/>
               </a:rPr>
               <a:t>04</a:t>
             </a:r>
@@ -4994,8 +5565,8 @@
         </p:nvSpPr>
         <p:spPr>
           <a:xfrm xmlns:a="http://schemas.openxmlformats.org/drawingml/2006/main">
-            <a:off x="609600" y="2619375"/>
-            <a:ext cx="4953000" cy="428625"/>
+            <a:off x="609600" y="2257425"/>
+            <a:ext cx="5143500" cy="533400"/>
           </a:xfrm>
           <a:prstGeom xmlns:a="http://schemas.openxmlformats.org/drawingml/2006/main" prst="rect">
             <a:avLst/>
@@ -5007,21 +5578,30 @@
           </a:ln>
         </p:spPr>
         <p:txBody>
-          <a:bodyPr xmlns:a="http://schemas.openxmlformats.org/drawingml/2006/main" lIns="0" tIns="0" rIns="0" bIns="0" anchor="ctr"/>
+          <a:bodyPr xmlns:a="http://schemas.openxmlformats.org/drawingml/2006/main" wrap="square" lIns="0" tIns="0" rIns="0" bIns="0" anchor="ctr">
+            <a:noAutofit/>
+          </a:bodyPr>
           <a:lstStyle xmlns:a="http://schemas.openxmlformats.org/drawingml/2006/main"/>
           <a:p xmlns:a="http://schemas.openxmlformats.org/drawingml/2006/main">
             <a:pPr>
-              <a:defRPr sz="2025" b="1">
+              <a:buNone/>
+              <a:defRPr sz="2100" b="1">
                 <a:solidFill>
                   <a:srgbClr val="28685E"/>
                 </a:solidFill>
+                <a:latin typeface="Arial"/>
+                <a:ea typeface="Arial"/>
+                <a:cs typeface="Arial"/>
               </a:defRPr>
             </a:pPr>
             <a:r>
-              <a:rPr sz="2025" b="1">
+              <a:rPr sz="2100" b="1">
                 <a:solidFill>
                   <a:srgbClr val="28685E"/>
                 </a:solidFill>
+                <a:latin typeface="Arial"/>
+                <a:ea typeface="Arial"/>
+                <a:cs typeface="Arial"/>
               </a:rPr>
               <a:t>TWO LARGE GROUPS</a:t>
             </a:r>
@@ -5044,8 +5624,8 @@
         </p:nvSpPr>
         <p:spPr>
           <a:xfrm xmlns:a="http://schemas.openxmlformats.org/drawingml/2006/main">
-            <a:off x="6572250" y="2619375"/>
-            <a:ext cx="4953000" cy="428625"/>
+            <a:off x="6572250" y="2257425"/>
+            <a:ext cx="5010150" cy="533400"/>
           </a:xfrm>
           <a:prstGeom xmlns:a="http://schemas.openxmlformats.org/drawingml/2006/main" prst="rect">
             <a:avLst/>
@@ -5057,21 +5637,30 @@
           </a:ln>
         </p:spPr>
         <p:txBody>
-          <a:bodyPr xmlns:a="http://schemas.openxmlformats.org/drawingml/2006/main" lIns="0" tIns="0" rIns="0" bIns="0" anchor="ctr"/>
+          <a:bodyPr xmlns:a="http://schemas.openxmlformats.org/drawingml/2006/main" wrap="square" lIns="0" tIns="0" rIns="0" bIns="0" anchor="ctr">
+            <a:noAutofit/>
+          </a:bodyPr>
           <a:lstStyle xmlns:a="http://schemas.openxmlformats.org/drawingml/2006/main"/>
           <a:p xmlns:a="http://schemas.openxmlformats.org/drawingml/2006/main">
             <a:pPr>
-              <a:defRPr sz="2025" b="1">
+              <a:buNone/>
+              <a:defRPr sz="2100" b="1">
                 <a:solidFill>
                   <a:srgbClr val="A65D25"/>
                 </a:solidFill>
+                <a:latin typeface="Arial"/>
+                <a:ea typeface="Arial"/>
+                <a:cs typeface="Arial"/>
               </a:defRPr>
             </a:pPr>
             <a:r>
-              <a:rPr sz="2025" b="1">
+              <a:rPr sz="2100" b="1">
                 <a:solidFill>
                   <a:srgbClr val="A65D25"/>
                 </a:solidFill>
+                <a:latin typeface="Arial"/>
+                <a:ea typeface="Arial"/>
+                <a:cs typeface="Arial"/>
               </a:rPr>
               <a:t>OTHER GROUPS</a:t>
             </a:r>
@@ -5094,8 +5683,8 @@
         </p:nvSpPr>
         <p:spPr>
           <a:xfrm xmlns:a="http://schemas.openxmlformats.org/drawingml/2006/main">
-            <a:off x="609600" y="3333750"/>
-            <a:ext cx="4953000" cy="2524125"/>
+            <a:off x="609600" y="4381500"/>
+            <a:ext cx="5143500" cy="1571625"/>
           </a:xfrm>
           <a:prstGeom xmlns:a="http://schemas.openxmlformats.org/drawingml/2006/main" prst="rect">
             <a:avLst/>
@@ -5107,14 +5696,20 @@
           </a:ln>
         </p:spPr>
         <p:txBody>
-          <a:bodyPr xmlns:a="http://schemas.openxmlformats.org/drawingml/2006/main" lIns="0" tIns="0" rIns="0" bIns="0" anchor="ctr"/>
+          <a:bodyPr xmlns:a="http://schemas.openxmlformats.org/drawingml/2006/main" wrap="square" lIns="0" tIns="0" rIns="0" bIns="0" anchor="ctr">
+            <a:noAutofit/>
+          </a:bodyPr>
           <a:lstStyle xmlns:a="http://schemas.openxmlformats.org/drawingml/2006/main"/>
           <a:p xmlns:a="http://schemas.openxmlformats.org/drawingml/2006/main">
             <a:pPr>
+              <a:buNone/>
               <a:defRPr sz="2400" b="0">
                 <a:solidFill>
                   <a:srgbClr val="152B3A"/>
                 </a:solidFill>
+                <a:latin typeface="Arial"/>
+                <a:ea typeface="Arial"/>
+                <a:cs typeface="Arial"/>
               </a:defRPr>
             </a:pPr>
             <a:r>
@@ -5122,16 +5717,23 @@
                 <a:solidFill>
                   <a:srgbClr val="152B3A"/>
                 </a:solidFill>
+                <a:latin typeface="Arial"/>
+                <a:ea typeface="Arial"/>
+                <a:cs typeface="Arial"/>
               </a:rPr>
               <a:t>Fruit and vegetables</a:t>
             </a:r>
           </a:p>
           <a:p xmlns:a="http://schemas.openxmlformats.org/drawingml/2006/main">
             <a:pPr>
+              <a:buNone/>
               <a:defRPr sz="2400" b="0">
                 <a:solidFill>
                   <a:srgbClr val="152B3A"/>
                 </a:solidFill>
+                <a:latin typeface="Arial"/>
+                <a:ea typeface="Arial"/>
+                <a:cs typeface="Arial"/>
               </a:defRPr>
             </a:pPr>
             <a:r>
@@ -5139,6 +5741,9 @@
                 <a:solidFill>
                   <a:srgbClr val="152B3A"/>
                 </a:solidFill>
+                <a:latin typeface="Arial"/>
+                <a:ea typeface="Arial"/>
+                <a:cs typeface="Arial"/>
               </a:rPr>
               <a:t>Starchy carbohydrate foods</a:t>
             </a:r>
@@ -5161,8 +5766,8 @@
         </p:nvSpPr>
         <p:spPr>
           <a:xfrm xmlns:a="http://schemas.openxmlformats.org/drawingml/2006/main">
-            <a:off x="6572250" y="3333750"/>
-            <a:ext cx="4857750" cy="2524125"/>
+            <a:off x="6572250" y="4381500"/>
+            <a:ext cx="5010150" cy="1571625"/>
           </a:xfrm>
           <a:prstGeom xmlns:a="http://schemas.openxmlformats.org/drawingml/2006/main" prst="rect">
             <a:avLst/>
@@ -5174,14 +5779,20 @@
           </a:ln>
         </p:spPr>
         <p:txBody>
-          <a:bodyPr xmlns:a="http://schemas.openxmlformats.org/drawingml/2006/main" lIns="0" tIns="0" rIns="0" bIns="0" anchor="ctr"/>
+          <a:bodyPr xmlns:a="http://schemas.openxmlformats.org/drawingml/2006/main" wrap="square" lIns="0" tIns="0" rIns="0" bIns="0" anchor="ctr">
+            <a:noAutofit/>
+          </a:bodyPr>
           <a:lstStyle xmlns:a="http://schemas.openxmlformats.org/drawingml/2006/main"/>
           <a:p xmlns:a="http://schemas.openxmlformats.org/drawingml/2006/main">
             <a:pPr>
+              <a:buNone/>
               <a:defRPr sz="2400" b="0">
                 <a:solidFill>
                   <a:srgbClr val="152B3A"/>
                 </a:solidFill>
+                <a:latin typeface="Arial"/>
+                <a:ea typeface="Arial"/>
+                <a:cs typeface="Arial"/>
               </a:defRPr>
             </a:pPr>
             <a:r>
@@ -5189,16 +5800,23 @@
                 <a:solidFill>
                   <a:srgbClr val="152B3A"/>
                 </a:solidFill>
+                <a:latin typeface="Arial"/>
+                <a:ea typeface="Arial"/>
+                <a:cs typeface="Arial"/>
               </a:rPr>
               <a:t>Protein-source foods</a:t>
             </a:r>
           </a:p>
           <a:p xmlns:a="http://schemas.openxmlformats.org/drawingml/2006/main">
             <a:pPr>
+              <a:buNone/>
               <a:defRPr sz="2400" b="0">
                 <a:solidFill>
                   <a:srgbClr val="152B3A"/>
                 </a:solidFill>
+                <a:latin typeface="Arial"/>
+                <a:ea typeface="Arial"/>
+                <a:cs typeface="Arial"/>
               </a:defRPr>
             </a:pPr>
             <a:r>
@@ -5206,16 +5824,23 @@
                 <a:solidFill>
                   <a:srgbClr val="152B3A"/>
                 </a:solidFill>
+                <a:latin typeface="Arial"/>
+                <a:ea typeface="Arial"/>
+                <a:cs typeface="Arial"/>
               </a:rPr>
               <a:t>Dairy and alternatives</a:t>
             </a:r>
           </a:p>
           <a:p xmlns:a="http://schemas.openxmlformats.org/drawingml/2006/main">
             <a:pPr>
+              <a:buNone/>
               <a:defRPr sz="2400" b="0">
                 <a:solidFill>
                   <a:srgbClr val="152B3A"/>
                 </a:solidFill>
+                <a:latin typeface="Arial"/>
+                <a:ea typeface="Arial"/>
+                <a:cs typeface="Arial"/>
               </a:defRPr>
             </a:pPr>
             <a:r>
@@ -5223,12 +5848,121 @@
                 <a:solidFill>
                   <a:srgbClr val="152B3A"/>
                 </a:solidFill>
+                <a:latin typeface="Arial"/>
+                <a:ea typeface="Arial"/>
+                <a:cs typeface="Arial"/>
               </a:rPr>
               <a:t>Oils and spreads</a:t>
             </a:r>
           </a:p>
         </p:txBody>
       </p:sp>
+      <p:sp>
+        <p:nvSpPr>
+          <p:cNvPr id="14" name="">
+            <a:extLst xmlns:a="http://schemas.openxmlformats.org/drawingml/2006/main">
+              <a:ext uri="{FF2B5EF4-FFF2-40B4-BE49-F238E27FC236}">
+                <a16:creationId xmlns:a16="http://schemas.microsoft.com/office/drawing/2014/main" id="{AC3595B4-AC6C-4573-920B-C6DB393B355A}"/>
+              </a:ext>
+            </a:extLst>
+          </p:cNvPr>
+          <p:cNvSpPr>
+            <a:spLocks xmlns:a="http://schemas.openxmlformats.org/drawingml/2006/main" noGrp="1"/>
+          </p:cNvSpPr>
+          <p:nvPr/>
+        </p:nvSpPr>
+        <p:spPr>
+          <a:xfrm xmlns:a="http://schemas.openxmlformats.org/drawingml/2006/main">
+            <a:off x="609600" y="2886075"/>
+            <a:ext cx="5048250" cy="0"/>
+          </a:xfrm>
+          <a:prstGeom xmlns:a="http://schemas.openxmlformats.org/drawingml/2006/main" prst="line">
+            <a:avLst/>
+          </a:prstGeom>
+          <a:noFill xmlns:a="http://schemas.openxmlformats.org/drawingml/2006/main"/>
+          <a:ln xmlns:a="http://schemas.openxmlformats.org/drawingml/2006/main" w="28575">
+            <a:solidFill>
+              <a:srgbClr val="DCE7DD"/>
+            </a:solidFill>
+            <a:prstDash val="solid"/>
+          </a:ln>
+        </p:spPr>
+      </p:sp>
+      <p:sp>
+        <p:nvSpPr>
+          <p:cNvPr id="15" name="">
+            <a:extLst xmlns:a="http://schemas.openxmlformats.org/drawingml/2006/main">
+              <a:ext uri="{FF2B5EF4-FFF2-40B4-BE49-F238E27FC236}">
+                <a16:creationId xmlns:a16="http://schemas.microsoft.com/office/drawing/2014/main" id="{A6C7DB6A-3E14-4C44-9370-D4B978DA2318}"/>
+              </a:ext>
+            </a:extLst>
+          </p:cNvPr>
+          <p:cNvSpPr>
+            <a:spLocks xmlns:a="http://schemas.openxmlformats.org/drawingml/2006/main" noGrp="1"/>
+          </p:cNvSpPr>
+          <p:nvPr/>
+        </p:nvSpPr>
+        <p:spPr>
+          <a:xfrm xmlns:a="http://schemas.openxmlformats.org/drawingml/2006/main">
+            <a:off x="6572250" y="2886075"/>
+            <a:ext cx="5010150" cy="0"/>
+          </a:xfrm>
+          <a:prstGeom xmlns:a="http://schemas.openxmlformats.org/drawingml/2006/main" prst="line">
+            <a:avLst/>
+          </a:prstGeom>
+          <a:noFill xmlns:a="http://schemas.openxmlformats.org/drawingml/2006/main"/>
+          <a:ln xmlns:a="http://schemas.openxmlformats.org/drawingml/2006/main" w="28575">
+            <a:solidFill>
+              <a:srgbClr val="DCE7DD"/>
+            </a:solidFill>
+            <a:prstDash val="solid"/>
+          </a:ln>
+        </p:spPr>
+      </p:sp>
+      <p:pic>
+        <p:nvPicPr>
+          <p:cNvPr id="31" name=""/>
+          <p:cNvPicPr>
+            <a:picLocks xmlns:a="http://schemas.openxmlformats.org/drawingml/2006/main" noChangeAspect="1"/>
+          </p:cNvPicPr>
+          <p:nvPr/>
+        </p:nvPicPr>
+        <p:blipFill>
+          <a:blip xmlns:r="http://schemas.openxmlformats.org/officeDocument/2006/relationships" xmlns:a="http://schemas.openxmlformats.org/drawingml/2006/main" r:embed="R835006cdd3d84f52"/>
+          <a:stretch xmlns:a="http://schemas.openxmlformats.org/drawingml/2006/main"/>
+        </p:blipFill>
+        <p:spPr>
+          <a:xfrm xmlns:a="http://schemas.openxmlformats.org/drawingml/2006/main">
+            <a:off x="1941699" y="2952750"/>
+            <a:ext cx="2241176" cy="1428750"/>
+          </a:xfrm>
+          <a:prstGeom xmlns:a="http://schemas.openxmlformats.org/drawingml/2006/main" prst="rect">
+            <a:avLst/>
+          </a:prstGeom>
+        </p:spPr>
+      </p:pic>
+      <p:pic>
+        <p:nvPicPr>
+          <p:cNvPr id="32" name=""/>
+          <p:cNvPicPr>
+            <a:picLocks xmlns:a="http://schemas.openxmlformats.org/drawingml/2006/main" noChangeAspect="1"/>
+          </p:cNvPicPr>
+          <p:nvPr/>
+        </p:nvPicPr>
+        <p:blipFill>
+          <a:blip xmlns:r="http://schemas.openxmlformats.org/officeDocument/2006/relationships" xmlns:a="http://schemas.openxmlformats.org/drawingml/2006/main" r:embed="R0dfd8654ee6f4753"/>
+          <a:stretch xmlns:a="http://schemas.openxmlformats.org/drawingml/2006/main"/>
+        </p:blipFill>
+        <p:spPr>
+          <a:xfrm xmlns:a="http://schemas.openxmlformats.org/drawingml/2006/main">
+            <a:off x="8478838" y="2952750"/>
+            <a:ext cx="1092200" cy="1428750"/>
+          </a:xfrm>
+          <a:prstGeom xmlns:a="http://schemas.openxmlformats.org/drawingml/2006/main" prst="rect">
+            <a:avLst/>
+          </a:prstGeom>
+        </p:spPr>
+      </p:pic>
     </p:spTree>
     <p:extLst>
       <p:ext uri="{BB962C8B-B14F-4D97-AF65-F5344CB8AC3E}">
@@ -5245,7 +5979,7 @@
     <p:bg>
       <p:bgPr>
         <a:solidFill xmlns:a="http://schemas.openxmlformats.org/drawingml/2006/main">
-          <a:srgbClr val="F5F1E8"/>
+          <a:srgbClr val="FBF9F3"/>
         </a:solidFill>
       </p:bgPr>
     </p:bg>
@@ -5274,8 +6008,8 @@
         </p:nvSpPr>
         <p:spPr>
           <a:xfrm xmlns:a="http://schemas.openxmlformats.org/drawingml/2006/main">
-            <a:off x="609600" y="552450"/>
-            <a:ext cx="781050" cy="57150"/>
+            <a:off x="609600" y="742950"/>
+            <a:ext cx="9906000" cy="38100"/>
           </a:xfrm>
           <a:prstGeom xmlns:a="http://schemas.openxmlformats.org/drawingml/2006/main" prst="rect">
             <a:avLst/>
@@ -5305,8 +6039,8 @@
         </p:nvSpPr>
         <p:spPr>
           <a:xfrm xmlns:a="http://schemas.openxmlformats.org/drawingml/2006/main">
-            <a:off x="609600" y="762000"/>
-            <a:ext cx="9334500" cy="285750"/>
+            <a:off x="609600" y="342900"/>
+            <a:ext cx="9334500" cy="266700"/>
           </a:xfrm>
           <a:prstGeom xmlns:a="http://schemas.openxmlformats.org/drawingml/2006/main" prst="rect">
             <a:avLst/>
@@ -5318,21 +6052,30 @@
           </a:ln>
         </p:spPr>
         <p:txBody>
-          <a:bodyPr xmlns:a="http://schemas.openxmlformats.org/drawingml/2006/main" lIns="0" tIns="0" rIns="0" bIns="0" anchor="ctr"/>
+          <a:bodyPr xmlns:a="http://schemas.openxmlformats.org/drawingml/2006/main" wrap="square" lIns="0" tIns="0" rIns="0" bIns="0" anchor="ctr">
+            <a:noAutofit/>
+          </a:bodyPr>
           <a:lstStyle xmlns:a="http://schemas.openxmlformats.org/drawingml/2006/main"/>
           <a:p xmlns:a="http://schemas.openxmlformats.org/drawingml/2006/main">
             <a:pPr>
-              <a:defRPr sz="1500" b="1">
+              <a:buNone/>
+              <a:defRPr sz="1425" b="1">
                 <a:solidFill>
                   <a:srgbClr val="28685E"/>
                 </a:solidFill>
+                <a:latin typeface="Arial"/>
+                <a:ea typeface="Arial"/>
+                <a:cs typeface="Arial"/>
               </a:defRPr>
             </a:pPr>
             <a:r>
-              <a:rPr sz="1500" b="1">
+              <a:rPr sz="1425" b="1">
                 <a:solidFill>
                   <a:srgbClr val="28685E"/>
                 </a:solidFill>
+                <a:latin typeface="Arial"/>
+                <a:ea typeface="Arial"/>
+                <a:cs typeface="Arial"/>
               </a:rPr>
               <a:t>MADE BY MATT  /  BUILD SCIENCE</a:t>
             </a:r>
@@ -5341,14 +6084,14 @@
       </p:sp>
       <p:pic>
         <p:nvPicPr>
-          <p:cNvPr id="12" name=""/>
+          <p:cNvPr id="15" name=""/>
           <p:cNvPicPr>
             <a:picLocks xmlns:a="http://schemas.openxmlformats.org/drawingml/2006/main" noChangeAspect="1"/>
           </p:cNvPicPr>
           <p:nvPr/>
         </p:nvPicPr>
         <p:blipFill>
-          <a:blip xmlns:r="http://schemas.openxmlformats.org/officeDocument/2006/relationships" xmlns:a="http://schemas.openxmlformats.org/drawingml/2006/main" r:embed="R77ac69c1199b458d"/>
+          <a:blip xmlns:r="http://schemas.openxmlformats.org/officeDocument/2006/relationships" xmlns:a="http://schemas.openxmlformats.org/drawingml/2006/main" r:embed="Rc50fc2ddb7c24c49"/>
           <a:stretch xmlns:a="http://schemas.openxmlformats.org/drawingml/2006/main"/>
         </p:blipFill>
         <p:spPr>
@@ -5377,8 +6120,8 @@
         </p:nvSpPr>
         <p:spPr>
           <a:xfrm xmlns:a="http://schemas.openxmlformats.org/drawingml/2006/main">
-            <a:off x="609600" y="1352550"/>
-            <a:ext cx="10972800" cy="952500"/>
+            <a:off x="609600" y="1047750"/>
+            <a:ext cx="10972800" cy="895350"/>
           </a:xfrm>
           <a:prstGeom xmlns:a="http://schemas.openxmlformats.org/drawingml/2006/main" prst="rect">
             <a:avLst/>
@@ -5390,21 +6133,30 @@
           </a:ln>
         </p:spPr>
         <p:txBody>
-          <a:bodyPr xmlns:a="http://schemas.openxmlformats.org/drawingml/2006/main" lIns="0" tIns="0" rIns="0" bIns="0" anchor="ctr"/>
+          <a:bodyPr xmlns:a="http://schemas.openxmlformats.org/drawingml/2006/main" wrap="square" lIns="0" tIns="0" rIns="0" bIns="0" anchor="ctr">
+            <a:noAutofit/>
+          </a:bodyPr>
           <a:lstStyle xmlns:a="http://schemas.openxmlformats.org/drawingml/2006/main"/>
           <a:p xmlns:a="http://schemas.openxmlformats.org/drawingml/2006/main">
             <a:pPr>
-              <a:defRPr sz="3750" b="1">
+              <a:buNone/>
+              <a:defRPr sz="3600" b="1">
                 <a:solidFill>
                   <a:srgbClr val="152B3A"/>
                 </a:solidFill>
+                <a:latin typeface="Arial"/>
+                <a:ea typeface="Arial"/>
+                <a:cs typeface="Arial"/>
               </a:defRPr>
             </a:pPr>
             <a:r>
-              <a:rPr sz="3750" b="1">
+              <a:rPr sz="3600" b="1">
                 <a:solidFill>
                   <a:srgbClr val="152B3A"/>
                 </a:solidFill>
+                <a:latin typeface="Arial"/>
+                <a:ea typeface="Arial"/>
+                <a:cs typeface="Arial"/>
               </a:rPr>
               <a:t>Place one food, explain its group</a:t>
             </a:r>
@@ -5471,21 +6223,30 @@
           </a:ln>
         </p:spPr>
         <p:txBody>
-          <a:bodyPr xmlns:a="http://schemas.openxmlformats.org/drawingml/2006/main" lIns="0" tIns="0" rIns="0" bIns="0" anchor="ctr"/>
+          <a:bodyPr xmlns:a="http://schemas.openxmlformats.org/drawingml/2006/main" wrap="square" lIns="0" tIns="0" rIns="0" bIns="0" anchor="ctr">
+            <a:noAutofit/>
+          </a:bodyPr>
           <a:lstStyle xmlns:a="http://schemas.openxmlformats.org/drawingml/2006/main"/>
           <a:p xmlns:a="http://schemas.openxmlformats.org/drawingml/2006/main">
             <a:pPr>
-              <a:defRPr sz="1275" b="0">
+              <a:buNone/>
+              <a:defRPr sz="1200" b="0">
                 <a:solidFill>
                   <a:srgbClr val="50616B"/>
                 </a:solidFill>
+                <a:latin typeface="Arial"/>
+                <a:ea typeface="Arial"/>
+                <a:cs typeface="Arial"/>
               </a:defRPr>
             </a:pPr>
             <a:r>
-              <a:rPr sz="1275" b="0">
+              <a:rPr sz="1200" b="0">
                 <a:solidFill>
                   <a:srgbClr val="50616B"/>
                 </a:solidFill>
+                <a:latin typeface="Arial"/>
+                <a:ea typeface="Arial"/>
+                <a:cs typeface="Arial"/>
               </a:rPr>
               <a:t>AUTUMN 1  ·  WEEK 6  ·  LESSON A</a:t>
             </a:r>
@@ -5521,14 +6282,20 @@
           </a:ln>
         </p:spPr>
         <p:txBody>
-          <a:bodyPr xmlns:a="http://schemas.openxmlformats.org/drawingml/2006/main" lIns="0" tIns="0" rIns="0" bIns="0" anchor="ctr"/>
+          <a:bodyPr xmlns:a="http://schemas.openxmlformats.org/drawingml/2006/main" wrap="square" lIns="0" tIns="0" rIns="0" bIns="0" anchor="ctr">
+            <a:noAutofit/>
+          </a:bodyPr>
           <a:lstStyle xmlns:a="http://schemas.openxmlformats.org/drawingml/2006/main"/>
           <a:p xmlns:a="http://schemas.openxmlformats.org/drawingml/2006/main">
             <a:pPr>
+              <a:buNone/>
               <a:defRPr sz="1350" b="1">
                 <a:solidFill>
                   <a:srgbClr val="28685E"/>
                 </a:solidFill>
+                <a:latin typeface="Arial"/>
+                <a:ea typeface="Arial"/>
+                <a:cs typeface="Arial"/>
               </a:defRPr>
             </a:pPr>
             <a:r>
@@ -5536,6 +6303,9 @@
                 <a:solidFill>
                   <a:srgbClr val="28685E"/>
                 </a:solidFill>
+                <a:latin typeface="Arial"/>
+                <a:ea typeface="Arial"/>
+                <a:cs typeface="Arial"/>
               </a:rPr>
               <a:t>05</a:t>
             </a:r>
@@ -5558,8 +6328,8 @@
         </p:nvSpPr>
         <p:spPr>
           <a:xfrm xmlns:a="http://schemas.openxmlformats.org/drawingml/2006/main">
-            <a:off x="609600" y="2686050"/>
-            <a:ext cx="10858500" cy="1524000"/>
+            <a:off x="609600" y="2428875"/>
+            <a:ext cx="6762750" cy="2190750"/>
           </a:xfrm>
           <a:prstGeom xmlns:a="http://schemas.openxmlformats.org/drawingml/2006/main" prst="rect">
             <a:avLst/>
@@ -5571,21 +6341,30 @@
           </a:ln>
         </p:spPr>
         <p:txBody>
-          <a:bodyPr xmlns:a="http://schemas.openxmlformats.org/drawingml/2006/main" lIns="0" tIns="0" rIns="0" bIns="0" anchor="ctr"/>
+          <a:bodyPr xmlns:a="http://schemas.openxmlformats.org/drawingml/2006/main" wrap="square" lIns="0" tIns="0" rIns="0" bIns="0" anchor="ctr">
+            <a:noAutofit/>
+          </a:bodyPr>
           <a:lstStyle xmlns:a="http://schemas.openxmlformats.org/drawingml/2006/main"/>
           <a:p xmlns:a="http://schemas.openxmlformats.org/drawingml/2006/main">
             <a:pPr>
-              <a:defRPr sz="2925" b="1">
+              <a:buNone/>
+              <a:defRPr sz="2850" b="1">
                 <a:solidFill>
                   <a:srgbClr val="28685E"/>
                 </a:solidFill>
+                <a:latin typeface="Arial"/>
+                <a:ea typeface="Arial"/>
+                <a:cs typeface="Arial"/>
               </a:defRPr>
             </a:pPr>
             <a:r>
-              <a:rPr sz="2925" b="1">
+              <a:rPr sz="2850" b="1">
                 <a:solidFill>
                   <a:srgbClr val="28685E"/>
                 </a:solidFill>
+                <a:latin typeface="Arial"/>
+                <a:ea typeface="Arial"/>
+                <a:cs typeface="Arial"/>
               </a:rPr>
               <a:t>Pasta belongs with starchy carbohydrate foods, such as bread, rice and potatoes.</a:t>
             </a:r>
@@ -5608,8 +6387,8 @@
         </p:nvSpPr>
         <p:spPr>
           <a:xfrm xmlns:a="http://schemas.openxmlformats.org/drawingml/2006/main">
-            <a:off x="609600" y="4552950"/>
-            <a:ext cx="10858500" cy="1285875"/>
+            <a:off x="609600" y="4972050"/>
+            <a:ext cx="7191375" cy="981075"/>
           </a:xfrm>
           <a:prstGeom xmlns:a="http://schemas.openxmlformats.org/drawingml/2006/main" prst="rect">
             <a:avLst/>
@@ -5621,27 +6400,58 @@
           </a:ln>
         </p:spPr>
         <p:txBody>
-          <a:bodyPr xmlns:a="http://schemas.openxmlformats.org/drawingml/2006/main" lIns="0" tIns="0" rIns="0" bIns="0" anchor="ctr"/>
+          <a:bodyPr xmlns:a="http://schemas.openxmlformats.org/drawingml/2006/main" wrap="square" lIns="0" tIns="0" rIns="0" bIns="0" anchor="ctr">
+            <a:noAutofit/>
+          </a:bodyPr>
           <a:lstStyle xmlns:a="http://schemas.openxmlformats.org/drawingml/2006/main"/>
           <a:p xmlns:a="http://schemas.openxmlformats.org/drawingml/2006/main">
             <a:pPr>
-              <a:defRPr sz="2700" b="0">
+              <a:buNone/>
+              <a:defRPr sz="2325" b="0">
                 <a:solidFill>
                   <a:srgbClr val="152B3A"/>
                 </a:solidFill>
+                <a:latin typeface="Arial"/>
+                <a:ea typeface="Arial"/>
+                <a:cs typeface="Arial"/>
               </a:defRPr>
             </a:pPr>
             <a:r>
-              <a:rPr sz="2700" b="0">
+              <a:rPr sz="2325" b="0">
                 <a:solidFill>
                   <a:srgbClr val="152B3A"/>
                 </a:solidFill>
+                <a:latin typeface="Arial"/>
+                <a:ea typeface="Arial"/>
+                <a:cs typeface="Arial"/>
               </a:rPr>
               <a:t>The group is about the food’s broad place in this model.</a:t>
             </a:r>
           </a:p>
         </p:txBody>
       </p:sp>
+      <p:pic>
+        <p:nvPicPr>
+          <p:cNvPr id="22" name=""/>
+          <p:cNvPicPr>
+            <a:picLocks xmlns:a="http://schemas.openxmlformats.org/drawingml/2006/main" noChangeAspect="1"/>
+          </p:cNvPicPr>
+          <p:nvPr/>
+        </p:nvPicPr>
+        <p:blipFill>
+          <a:blip xmlns:r="http://schemas.openxmlformats.org/officeDocument/2006/relationships" xmlns:a="http://schemas.openxmlformats.org/drawingml/2006/main" r:embed="R652c55b901544cb2"/>
+          <a:stretch xmlns:a="http://schemas.openxmlformats.org/drawingml/2006/main"/>
+        </p:blipFill>
+        <p:spPr>
+          <a:xfrm xmlns:a="http://schemas.openxmlformats.org/drawingml/2006/main">
+            <a:off x="8391631" y="2628900"/>
+            <a:ext cx="2838238" cy="2524125"/>
+          </a:xfrm>
+          <a:prstGeom xmlns:a="http://schemas.openxmlformats.org/drawingml/2006/main" prst="rect">
+            <a:avLst/>
+          </a:prstGeom>
+        </p:spPr>
+      </p:pic>
     </p:spTree>
     <p:extLst>
       <p:ext uri="{BB962C8B-B14F-4D97-AF65-F5344CB8AC3E}">
@@ -5658,7 +6468,7 @@
     <p:bg>
       <p:bgPr>
         <a:solidFill xmlns:a="http://schemas.openxmlformats.org/drawingml/2006/main">
-          <a:srgbClr val="F5F1E8"/>
+          <a:srgbClr val="FBF9F3"/>
         </a:solidFill>
       </p:bgPr>
     </p:bg>
@@ -5687,8 +6497,8 @@
         </p:nvSpPr>
         <p:spPr>
           <a:xfrm xmlns:a="http://schemas.openxmlformats.org/drawingml/2006/main">
-            <a:off x="609600" y="552450"/>
-            <a:ext cx="781050" cy="57150"/>
+            <a:off x="609600" y="742950"/>
+            <a:ext cx="9906000" cy="38100"/>
           </a:xfrm>
           <a:prstGeom xmlns:a="http://schemas.openxmlformats.org/drawingml/2006/main" prst="rect">
             <a:avLst/>
@@ -5718,8 +6528,8 @@
         </p:nvSpPr>
         <p:spPr>
           <a:xfrm xmlns:a="http://schemas.openxmlformats.org/drawingml/2006/main">
-            <a:off x="609600" y="762000"/>
-            <a:ext cx="9334500" cy="285750"/>
+            <a:off x="609600" y="342900"/>
+            <a:ext cx="9334500" cy="266700"/>
           </a:xfrm>
           <a:prstGeom xmlns:a="http://schemas.openxmlformats.org/drawingml/2006/main" prst="rect">
             <a:avLst/>
@@ -5731,21 +6541,30 @@
           </a:ln>
         </p:spPr>
         <p:txBody>
-          <a:bodyPr xmlns:a="http://schemas.openxmlformats.org/drawingml/2006/main" lIns="0" tIns="0" rIns="0" bIns="0" anchor="ctr"/>
+          <a:bodyPr xmlns:a="http://schemas.openxmlformats.org/drawingml/2006/main" wrap="square" lIns="0" tIns="0" rIns="0" bIns="0" anchor="ctr">
+            <a:noAutofit/>
+          </a:bodyPr>
           <a:lstStyle xmlns:a="http://schemas.openxmlformats.org/drawingml/2006/main"/>
           <a:p xmlns:a="http://schemas.openxmlformats.org/drawingml/2006/main">
             <a:pPr>
-              <a:defRPr sz="1500" b="1">
+              <a:buNone/>
+              <a:defRPr sz="1425" b="1">
                 <a:solidFill>
                   <a:srgbClr val="28685E"/>
                 </a:solidFill>
+                <a:latin typeface="Arial"/>
+                <a:ea typeface="Arial"/>
+                <a:cs typeface="Arial"/>
               </a:defRPr>
             </a:pPr>
             <a:r>
-              <a:rPr sz="1500" b="1">
+              <a:rPr sz="1425" b="1">
                 <a:solidFill>
                   <a:srgbClr val="28685E"/>
                 </a:solidFill>
+                <a:latin typeface="Arial"/>
+                <a:ea typeface="Arial"/>
+                <a:cs typeface="Arial"/>
               </a:rPr>
               <a:t>MADE BY MATT  /  BUILD SCIENCE</a:t>
             </a:r>
@@ -5754,14 +6573,14 @@
       </p:sp>
       <p:pic>
         <p:nvPicPr>
-          <p:cNvPr id="13" name=""/>
+          <p:cNvPr id="16" name=""/>
           <p:cNvPicPr>
             <a:picLocks xmlns:a="http://schemas.openxmlformats.org/drawingml/2006/main" noChangeAspect="1"/>
           </p:cNvPicPr>
           <p:nvPr/>
         </p:nvPicPr>
         <p:blipFill>
-          <a:blip xmlns:r="http://schemas.openxmlformats.org/officeDocument/2006/relationships" xmlns:a="http://schemas.openxmlformats.org/drawingml/2006/main" r:embed="R02980e4e720344a7"/>
+          <a:blip xmlns:r="http://schemas.openxmlformats.org/officeDocument/2006/relationships" xmlns:a="http://schemas.openxmlformats.org/drawingml/2006/main" r:embed="R92dba21cd03843c9"/>
           <a:stretch xmlns:a="http://schemas.openxmlformats.org/drawingml/2006/main"/>
         </p:blipFill>
         <p:spPr>
@@ -5790,8 +6609,8 @@
         </p:nvSpPr>
         <p:spPr>
           <a:xfrm xmlns:a="http://schemas.openxmlformats.org/drawingml/2006/main">
-            <a:off x="609600" y="1352550"/>
-            <a:ext cx="10972800" cy="952500"/>
+            <a:off x="609600" y="1047750"/>
+            <a:ext cx="10972800" cy="895350"/>
           </a:xfrm>
           <a:prstGeom xmlns:a="http://schemas.openxmlformats.org/drawingml/2006/main" prst="rect">
             <a:avLst/>
@@ -5803,21 +6622,30 @@
           </a:ln>
         </p:spPr>
         <p:txBody>
-          <a:bodyPr xmlns:a="http://schemas.openxmlformats.org/drawingml/2006/main" lIns="0" tIns="0" rIns="0" bIns="0" anchor="ctr"/>
+          <a:bodyPr xmlns:a="http://schemas.openxmlformats.org/drawingml/2006/main" wrap="square" lIns="0" tIns="0" rIns="0" bIns="0" anchor="ctr">
+            <a:noAutofit/>
+          </a:bodyPr>
           <a:lstStyle xmlns:a="http://schemas.openxmlformats.org/drawingml/2006/main"/>
           <a:p xmlns:a="http://schemas.openxmlformats.org/drawingml/2006/main">
             <a:pPr>
-              <a:defRPr sz="3750" b="1">
+              <a:buNone/>
+              <a:defRPr sz="3600" b="1">
                 <a:solidFill>
                   <a:srgbClr val="152B3A"/>
                 </a:solidFill>
+                <a:latin typeface="Arial"/>
+                <a:ea typeface="Arial"/>
+                <a:cs typeface="Arial"/>
               </a:defRPr>
             </a:pPr>
             <a:r>
-              <a:rPr sz="3750" b="1">
+              <a:rPr sz="3600" b="1">
                 <a:solidFill>
                   <a:srgbClr val="152B3A"/>
                 </a:solidFill>
+                <a:latin typeface="Arial"/>
+                <a:ea typeface="Arial"/>
+                <a:cs typeface="Arial"/>
               </a:rPr>
               <a:t>Where do these four cards go?</a:t>
             </a:r>
@@ -5884,21 +6712,30 @@
           </a:ln>
         </p:spPr>
         <p:txBody>
-          <a:bodyPr xmlns:a="http://schemas.openxmlformats.org/drawingml/2006/main" lIns="0" tIns="0" rIns="0" bIns="0" anchor="ctr"/>
+          <a:bodyPr xmlns:a="http://schemas.openxmlformats.org/drawingml/2006/main" wrap="square" lIns="0" tIns="0" rIns="0" bIns="0" anchor="ctr">
+            <a:noAutofit/>
+          </a:bodyPr>
           <a:lstStyle xmlns:a="http://schemas.openxmlformats.org/drawingml/2006/main"/>
           <a:p xmlns:a="http://schemas.openxmlformats.org/drawingml/2006/main">
             <a:pPr>
-              <a:defRPr sz="1275" b="0">
+              <a:buNone/>
+              <a:defRPr sz="1200" b="0">
                 <a:solidFill>
                   <a:srgbClr val="50616B"/>
                 </a:solidFill>
+                <a:latin typeface="Arial"/>
+                <a:ea typeface="Arial"/>
+                <a:cs typeface="Arial"/>
               </a:defRPr>
             </a:pPr>
             <a:r>
-              <a:rPr sz="1275" b="0">
+              <a:rPr sz="1200" b="0">
                 <a:solidFill>
                   <a:srgbClr val="50616B"/>
                 </a:solidFill>
+                <a:latin typeface="Arial"/>
+                <a:ea typeface="Arial"/>
+                <a:cs typeface="Arial"/>
               </a:rPr>
               <a:t>AUTUMN 1  ·  WEEK 6  ·  LESSON A</a:t>
             </a:r>
@@ -5934,14 +6771,20 @@
           </a:ln>
         </p:spPr>
         <p:txBody>
-          <a:bodyPr xmlns:a="http://schemas.openxmlformats.org/drawingml/2006/main" lIns="0" tIns="0" rIns="0" bIns="0" anchor="ctr"/>
+          <a:bodyPr xmlns:a="http://schemas.openxmlformats.org/drawingml/2006/main" wrap="square" lIns="0" tIns="0" rIns="0" bIns="0" anchor="ctr">
+            <a:noAutofit/>
+          </a:bodyPr>
           <a:lstStyle xmlns:a="http://schemas.openxmlformats.org/drawingml/2006/main"/>
           <a:p xmlns:a="http://schemas.openxmlformats.org/drawingml/2006/main">
             <a:pPr>
+              <a:buNone/>
               <a:defRPr sz="1350" b="1">
                 <a:solidFill>
                   <a:srgbClr val="28685E"/>
                 </a:solidFill>
+                <a:latin typeface="Arial"/>
+                <a:ea typeface="Arial"/>
+                <a:cs typeface="Arial"/>
               </a:defRPr>
             </a:pPr>
             <a:r>
@@ -5949,6 +6792,9 @@
                 <a:solidFill>
                   <a:srgbClr val="28685E"/>
                 </a:solidFill>
+                <a:latin typeface="Arial"/>
+                <a:ea typeface="Arial"/>
+                <a:cs typeface="Arial"/>
               </a:rPr>
               <a:t>06</a:t>
             </a:r>
@@ -5971,8 +6817,8 @@
         </p:nvSpPr>
         <p:spPr>
           <a:xfrm xmlns:a="http://schemas.openxmlformats.org/drawingml/2006/main">
-            <a:off x="609600" y="2619375"/>
-            <a:ext cx="10972800" cy="781050"/>
+            <a:off x="609600" y="2305050"/>
+            <a:ext cx="7096125" cy="914400"/>
           </a:xfrm>
           <a:prstGeom xmlns:a="http://schemas.openxmlformats.org/drawingml/2006/main" prst="rect">
             <a:avLst/>
@@ -5984,14 +6830,20 @@
           </a:ln>
         </p:spPr>
         <p:txBody>
-          <a:bodyPr xmlns:a="http://schemas.openxmlformats.org/drawingml/2006/main" lIns="0" tIns="0" rIns="0" bIns="0" anchor="ctr"/>
+          <a:bodyPr xmlns:a="http://schemas.openxmlformats.org/drawingml/2006/main" wrap="square" lIns="0" tIns="0" rIns="0" bIns="0" anchor="ctr">
+            <a:noAutofit/>
+          </a:bodyPr>
           <a:lstStyle xmlns:a="http://schemas.openxmlformats.org/drawingml/2006/main"/>
           <a:p xmlns:a="http://schemas.openxmlformats.org/drawingml/2006/main">
             <a:pPr>
+              <a:buNone/>
               <a:defRPr sz="2550" b="0">
                 <a:solidFill>
                   <a:srgbClr val="152B3A"/>
                 </a:solidFill>
+                <a:latin typeface="Arial"/>
+                <a:ea typeface="Arial"/>
+                <a:cs typeface="Arial"/>
               </a:defRPr>
             </a:pPr>
             <a:r>
@@ -5999,6 +6851,9 @@
                 <a:solidFill>
                   <a:srgbClr val="152B3A"/>
                 </a:solidFill>
+                <a:latin typeface="Arial"/>
+                <a:ea typeface="Arial"/>
+                <a:cs typeface="Arial"/>
               </a:rPr>
               <a:t>Rice and bread</a:t>
             </a:r>
@@ -6021,8 +6876,8 @@
         </p:nvSpPr>
         <p:spPr>
           <a:xfrm xmlns:a="http://schemas.openxmlformats.org/drawingml/2006/main">
-            <a:off x="609600" y="3476625"/>
-            <a:ext cx="10972800" cy="781050"/>
+            <a:off x="609600" y="3352800"/>
+            <a:ext cx="7096125" cy="914400"/>
           </a:xfrm>
           <a:prstGeom xmlns:a="http://schemas.openxmlformats.org/drawingml/2006/main" prst="rect">
             <a:avLst/>
@@ -6034,14 +6889,20 @@
           </a:ln>
         </p:spPr>
         <p:txBody>
-          <a:bodyPr xmlns:a="http://schemas.openxmlformats.org/drawingml/2006/main" lIns="0" tIns="0" rIns="0" bIns="0" anchor="ctr"/>
+          <a:bodyPr xmlns:a="http://schemas.openxmlformats.org/drawingml/2006/main" wrap="square" lIns="0" tIns="0" rIns="0" bIns="0" anchor="ctr">
+            <a:noAutofit/>
+          </a:bodyPr>
           <a:lstStyle xmlns:a="http://schemas.openxmlformats.org/drawingml/2006/main"/>
           <a:p xmlns:a="http://schemas.openxmlformats.org/drawingml/2006/main">
             <a:pPr>
+              <a:buNone/>
               <a:defRPr sz="2550" b="0">
                 <a:solidFill>
                   <a:srgbClr val="152B3A"/>
                 </a:solidFill>
+                <a:latin typeface="Arial"/>
+                <a:ea typeface="Arial"/>
+                <a:cs typeface="Arial"/>
               </a:defRPr>
             </a:pPr>
             <a:r>
@@ -6049,6 +6910,9 @@
                 <a:solidFill>
                   <a:srgbClr val="152B3A"/>
                 </a:solidFill>
+                <a:latin typeface="Arial"/>
+                <a:ea typeface="Arial"/>
+                <a:cs typeface="Arial"/>
               </a:rPr>
               <a:t>Carrot and apple</a:t>
             </a:r>
@@ -6071,8 +6935,8 @@
         </p:nvSpPr>
         <p:spPr>
           <a:xfrm xmlns:a="http://schemas.openxmlformats.org/drawingml/2006/main">
-            <a:off x="609600" y="4333875"/>
-            <a:ext cx="10972800" cy="781050"/>
+            <a:off x="609600" y="4400550"/>
+            <a:ext cx="7096125" cy="914400"/>
           </a:xfrm>
           <a:prstGeom xmlns:a="http://schemas.openxmlformats.org/drawingml/2006/main" prst="rect">
             <a:avLst/>
@@ -6084,27 +6948,58 @@
           </a:ln>
         </p:spPr>
         <p:txBody>
-          <a:bodyPr xmlns:a="http://schemas.openxmlformats.org/drawingml/2006/main" lIns="0" tIns="0" rIns="0" bIns="0" anchor="ctr"/>
+          <a:bodyPr xmlns:a="http://schemas.openxmlformats.org/drawingml/2006/main" wrap="square" lIns="0" tIns="0" rIns="0" bIns="0" anchor="ctr">
+            <a:noAutofit/>
+          </a:bodyPr>
           <a:lstStyle xmlns:a="http://schemas.openxmlformats.org/drawingml/2006/main"/>
           <a:p xmlns:a="http://schemas.openxmlformats.org/drawingml/2006/main">
             <a:pPr>
-              <a:defRPr sz="2550" b="0">
-                <a:solidFill>
-                  <a:srgbClr val="152B3A"/>
-                </a:solidFill>
+              <a:buNone/>
+              <a:defRPr sz="2550" b="1">
+                <a:solidFill>
+                  <a:srgbClr val="28685E"/>
+                </a:solidFill>
+                <a:latin typeface="Arial"/>
+                <a:ea typeface="Arial"/>
+                <a:cs typeface="Arial"/>
               </a:defRPr>
             </a:pPr>
             <a:r>
-              <a:rPr sz="2550" b="0">
-                <a:solidFill>
-                  <a:srgbClr val="152B3A"/>
-                </a:solidFill>
+              <a:rPr sz="2550" b="1">
+                <a:solidFill>
+                  <a:srgbClr val="28685E"/>
+                </a:solidFill>
+                <a:latin typeface="Arial"/>
+                <a:ea typeface="Arial"/>
+                <a:cs typeface="Arial"/>
               </a:rPr>
               <a:t>Choose the broad group for each pair.</a:t>
             </a:r>
           </a:p>
         </p:txBody>
       </p:sp>
+      <p:pic>
+        <p:nvPicPr>
+          <p:cNvPr id="24" name=""/>
+          <p:cNvPicPr>
+            <a:picLocks xmlns:a="http://schemas.openxmlformats.org/drawingml/2006/main" noChangeAspect="1"/>
+          </p:cNvPicPr>
+          <p:nvPr/>
+        </p:nvPicPr>
+        <p:blipFill>
+          <a:blip xmlns:r="http://schemas.openxmlformats.org/officeDocument/2006/relationships" xmlns:a="http://schemas.openxmlformats.org/drawingml/2006/main" r:embed="R8cd69ed4fdbc4aa5"/>
+          <a:stretch xmlns:a="http://schemas.openxmlformats.org/drawingml/2006/main"/>
+        </p:blipFill>
+        <p:spPr>
+          <a:xfrm xmlns:a="http://schemas.openxmlformats.org/drawingml/2006/main">
+            <a:off x="8429625" y="3132534"/>
+            <a:ext cx="2857500" cy="1821656"/>
+          </a:xfrm>
+          <a:prstGeom xmlns:a="http://schemas.openxmlformats.org/drawingml/2006/main" prst="rect">
+            <a:avLst/>
+          </a:prstGeom>
+        </p:spPr>
+      </p:pic>
     </p:spTree>
     <p:extLst>
       <p:ext uri="{BB962C8B-B14F-4D97-AF65-F5344CB8AC3E}">
@@ -6121,7 +7016,7 @@
     <p:bg>
       <p:bgPr>
         <a:solidFill xmlns:a="http://schemas.openxmlformats.org/drawingml/2006/main">
-          <a:srgbClr val="F5F1E8"/>
+          <a:srgbClr val="FBF9F3"/>
         </a:solidFill>
       </p:bgPr>
     </p:bg>
@@ -6150,8 +7045,8 @@
         </p:nvSpPr>
         <p:spPr>
           <a:xfrm xmlns:a="http://schemas.openxmlformats.org/drawingml/2006/main">
-            <a:off x="609600" y="552450"/>
-            <a:ext cx="781050" cy="57150"/>
+            <a:off x="609600" y="742950"/>
+            <a:ext cx="9906000" cy="38100"/>
           </a:xfrm>
           <a:prstGeom xmlns:a="http://schemas.openxmlformats.org/drawingml/2006/main" prst="rect">
             <a:avLst/>
@@ -6181,8 +7076,8 @@
         </p:nvSpPr>
         <p:spPr>
           <a:xfrm xmlns:a="http://schemas.openxmlformats.org/drawingml/2006/main">
-            <a:off x="609600" y="762000"/>
-            <a:ext cx="9334500" cy="285750"/>
+            <a:off x="609600" y="342900"/>
+            <a:ext cx="9334500" cy="266700"/>
           </a:xfrm>
           <a:prstGeom xmlns:a="http://schemas.openxmlformats.org/drawingml/2006/main" prst="rect">
             <a:avLst/>
@@ -6194,21 +7089,30 @@
           </a:ln>
         </p:spPr>
         <p:txBody>
-          <a:bodyPr xmlns:a="http://schemas.openxmlformats.org/drawingml/2006/main" lIns="0" tIns="0" rIns="0" bIns="0" anchor="ctr"/>
+          <a:bodyPr xmlns:a="http://schemas.openxmlformats.org/drawingml/2006/main" wrap="square" lIns="0" tIns="0" rIns="0" bIns="0" anchor="ctr">
+            <a:noAutofit/>
+          </a:bodyPr>
           <a:lstStyle xmlns:a="http://schemas.openxmlformats.org/drawingml/2006/main"/>
           <a:p xmlns:a="http://schemas.openxmlformats.org/drawingml/2006/main">
             <a:pPr>
-              <a:defRPr sz="1500" b="1">
+              <a:buNone/>
+              <a:defRPr sz="1425" b="1">
                 <a:solidFill>
                   <a:srgbClr val="28685E"/>
                 </a:solidFill>
+                <a:latin typeface="Arial"/>
+                <a:ea typeface="Arial"/>
+                <a:cs typeface="Arial"/>
               </a:defRPr>
             </a:pPr>
             <a:r>
-              <a:rPr sz="1500" b="1">
+              <a:rPr sz="1425" b="1">
                 <a:solidFill>
                   <a:srgbClr val="28685E"/>
                 </a:solidFill>
+                <a:latin typeface="Arial"/>
+                <a:ea typeface="Arial"/>
+                <a:cs typeface="Arial"/>
               </a:rPr>
               <a:t>MADE BY MATT  /  BUILD SCIENCE</a:t>
             </a:r>
@@ -6217,14 +7121,14 @@
       </p:sp>
       <p:pic>
         <p:nvPicPr>
-          <p:cNvPr id="13" name=""/>
+          <p:cNvPr id="16" name=""/>
           <p:cNvPicPr>
             <a:picLocks xmlns:a="http://schemas.openxmlformats.org/drawingml/2006/main" noChangeAspect="1"/>
           </p:cNvPicPr>
           <p:nvPr/>
         </p:nvPicPr>
         <p:blipFill>
-          <a:blip xmlns:r="http://schemas.openxmlformats.org/officeDocument/2006/relationships" xmlns:a="http://schemas.openxmlformats.org/drawingml/2006/main" r:embed="R936be49fedb349d4"/>
+          <a:blip xmlns:r="http://schemas.openxmlformats.org/officeDocument/2006/relationships" xmlns:a="http://schemas.openxmlformats.org/drawingml/2006/main" r:embed="R246a00e59ecb4fae"/>
           <a:stretch xmlns:a="http://schemas.openxmlformats.org/drawingml/2006/main"/>
         </p:blipFill>
         <p:spPr>
@@ -6253,8 +7157,8 @@
         </p:nvSpPr>
         <p:spPr>
           <a:xfrm xmlns:a="http://schemas.openxmlformats.org/drawingml/2006/main">
-            <a:off x="609600" y="1352550"/>
-            <a:ext cx="10972800" cy="952500"/>
+            <a:off x="609600" y="1047750"/>
+            <a:ext cx="10972800" cy="895350"/>
           </a:xfrm>
           <a:prstGeom xmlns:a="http://schemas.openxmlformats.org/drawingml/2006/main" prst="rect">
             <a:avLst/>
@@ -6266,21 +7170,30 @@
           </a:ln>
         </p:spPr>
         <p:txBody>
-          <a:bodyPr xmlns:a="http://schemas.openxmlformats.org/drawingml/2006/main" lIns="0" tIns="0" rIns="0" bIns="0" anchor="ctr"/>
+          <a:bodyPr xmlns:a="http://schemas.openxmlformats.org/drawingml/2006/main" wrap="square" lIns="0" tIns="0" rIns="0" bIns="0" anchor="ctr">
+            <a:noAutofit/>
+          </a:bodyPr>
           <a:lstStyle xmlns:a="http://schemas.openxmlformats.org/drawingml/2006/main"/>
           <a:p xmlns:a="http://schemas.openxmlformats.org/drawingml/2006/main">
             <a:pPr>
-              <a:defRPr sz="3750" b="1">
+              <a:buNone/>
+              <a:defRPr sz="3600" b="1">
                 <a:solidFill>
                   <a:srgbClr val="152B3A"/>
                 </a:solidFill>
+                <a:latin typeface="Arial"/>
+                <a:ea typeface="Arial"/>
+                <a:cs typeface="Arial"/>
               </a:defRPr>
             </a:pPr>
             <a:r>
-              <a:rPr sz="3750" b="1">
+              <a:rPr sz="3600" b="1">
                 <a:solidFill>
                   <a:srgbClr val="152B3A"/>
                 </a:solidFill>
+                <a:latin typeface="Arial"/>
+                <a:ea typeface="Arial"/>
+                <a:cs typeface="Arial"/>
               </a:rPr>
               <a:t>Now place the other four cards</a:t>
             </a:r>
@@ -6347,21 +7260,30 @@
           </a:ln>
         </p:spPr>
         <p:txBody>
-          <a:bodyPr xmlns:a="http://schemas.openxmlformats.org/drawingml/2006/main" lIns="0" tIns="0" rIns="0" bIns="0" anchor="ctr"/>
+          <a:bodyPr xmlns:a="http://schemas.openxmlformats.org/drawingml/2006/main" wrap="square" lIns="0" tIns="0" rIns="0" bIns="0" anchor="ctr">
+            <a:noAutofit/>
+          </a:bodyPr>
           <a:lstStyle xmlns:a="http://schemas.openxmlformats.org/drawingml/2006/main"/>
           <a:p xmlns:a="http://schemas.openxmlformats.org/drawingml/2006/main">
             <a:pPr>
-              <a:defRPr sz="1275" b="0">
+              <a:buNone/>
+              <a:defRPr sz="1200" b="0">
                 <a:solidFill>
                   <a:srgbClr val="50616B"/>
                 </a:solidFill>
+                <a:latin typeface="Arial"/>
+                <a:ea typeface="Arial"/>
+                <a:cs typeface="Arial"/>
               </a:defRPr>
             </a:pPr>
             <a:r>
-              <a:rPr sz="1275" b="0">
+              <a:rPr sz="1200" b="0">
                 <a:solidFill>
                   <a:srgbClr val="50616B"/>
                 </a:solidFill>
+                <a:latin typeface="Arial"/>
+                <a:ea typeface="Arial"/>
+                <a:cs typeface="Arial"/>
               </a:rPr>
               <a:t>AUTUMN 1  ·  WEEK 6  ·  LESSON A</a:t>
             </a:r>
@@ -6397,14 +7319,20 @@
           </a:ln>
         </p:spPr>
         <p:txBody>
-          <a:bodyPr xmlns:a="http://schemas.openxmlformats.org/drawingml/2006/main" lIns="0" tIns="0" rIns="0" bIns="0" anchor="ctr"/>
+          <a:bodyPr xmlns:a="http://schemas.openxmlformats.org/drawingml/2006/main" wrap="square" lIns="0" tIns="0" rIns="0" bIns="0" anchor="ctr">
+            <a:noAutofit/>
+          </a:bodyPr>
           <a:lstStyle xmlns:a="http://schemas.openxmlformats.org/drawingml/2006/main"/>
           <a:p xmlns:a="http://schemas.openxmlformats.org/drawingml/2006/main">
             <a:pPr>
+              <a:buNone/>
               <a:defRPr sz="1350" b="1">
                 <a:solidFill>
                   <a:srgbClr val="28685E"/>
                 </a:solidFill>
+                <a:latin typeface="Arial"/>
+                <a:ea typeface="Arial"/>
+                <a:cs typeface="Arial"/>
               </a:defRPr>
             </a:pPr>
             <a:r>
@@ -6412,6 +7340,9 @@
                 <a:solidFill>
                   <a:srgbClr val="28685E"/>
                 </a:solidFill>
+                <a:latin typeface="Arial"/>
+                <a:ea typeface="Arial"/>
+                <a:cs typeface="Arial"/>
               </a:rPr>
               <a:t>07</a:t>
             </a:r>
@@ -6434,8 +7365,8 @@
         </p:nvSpPr>
         <p:spPr>
           <a:xfrm xmlns:a="http://schemas.openxmlformats.org/drawingml/2006/main">
-            <a:off x="609600" y="2619375"/>
-            <a:ext cx="10972800" cy="781050"/>
+            <a:off x="609600" y="2305050"/>
+            <a:ext cx="7096125" cy="914400"/>
           </a:xfrm>
           <a:prstGeom xmlns:a="http://schemas.openxmlformats.org/drawingml/2006/main" prst="rect">
             <a:avLst/>
@@ -6447,14 +7378,20 @@
           </a:ln>
         </p:spPr>
         <p:txBody>
-          <a:bodyPr xmlns:a="http://schemas.openxmlformats.org/drawingml/2006/main" lIns="0" tIns="0" rIns="0" bIns="0" anchor="ctr"/>
+          <a:bodyPr xmlns:a="http://schemas.openxmlformats.org/drawingml/2006/main" wrap="square" lIns="0" tIns="0" rIns="0" bIns="0" anchor="ctr">
+            <a:noAutofit/>
+          </a:bodyPr>
           <a:lstStyle xmlns:a="http://schemas.openxmlformats.org/drawingml/2006/main"/>
           <a:p xmlns:a="http://schemas.openxmlformats.org/drawingml/2006/main">
             <a:pPr>
+              <a:buNone/>
               <a:defRPr sz="2550" b="0">
                 <a:solidFill>
                   <a:srgbClr val="152B3A"/>
                 </a:solidFill>
+                <a:latin typeface="Arial"/>
+                <a:ea typeface="Arial"/>
+                <a:cs typeface="Arial"/>
               </a:defRPr>
             </a:pPr>
             <a:r>
@@ -6462,6 +7399,9 @@
                 <a:solidFill>
                   <a:srgbClr val="152B3A"/>
                 </a:solidFill>
+                <a:latin typeface="Arial"/>
+                <a:ea typeface="Arial"/>
+                <a:cs typeface="Arial"/>
               </a:rPr>
               <a:t>Chicken and beans</a:t>
             </a:r>
@@ -6484,8 +7424,8 @@
         </p:nvSpPr>
         <p:spPr>
           <a:xfrm xmlns:a="http://schemas.openxmlformats.org/drawingml/2006/main">
-            <a:off x="609600" y="3476625"/>
-            <a:ext cx="10972800" cy="781050"/>
+            <a:off x="609600" y="3352800"/>
+            <a:ext cx="7096125" cy="914400"/>
           </a:xfrm>
           <a:prstGeom xmlns:a="http://schemas.openxmlformats.org/drawingml/2006/main" prst="rect">
             <a:avLst/>
@@ -6497,14 +7437,20 @@
           </a:ln>
         </p:spPr>
         <p:txBody>
-          <a:bodyPr xmlns:a="http://schemas.openxmlformats.org/drawingml/2006/main" lIns="0" tIns="0" rIns="0" bIns="0" anchor="ctr"/>
+          <a:bodyPr xmlns:a="http://schemas.openxmlformats.org/drawingml/2006/main" wrap="square" lIns="0" tIns="0" rIns="0" bIns="0" anchor="ctr">
+            <a:noAutofit/>
+          </a:bodyPr>
           <a:lstStyle xmlns:a="http://schemas.openxmlformats.org/drawingml/2006/main"/>
           <a:p xmlns:a="http://schemas.openxmlformats.org/drawingml/2006/main">
             <a:pPr>
+              <a:buNone/>
               <a:defRPr sz="2550" b="0">
                 <a:solidFill>
                   <a:srgbClr val="152B3A"/>
                 </a:solidFill>
+                <a:latin typeface="Arial"/>
+                <a:ea typeface="Arial"/>
+                <a:cs typeface="Arial"/>
               </a:defRPr>
             </a:pPr>
             <a:r>
@@ -6512,6 +7458,9 @@
                 <a:solidFill>
                   <a:srgbClr val="152B3A"/>
                 </a:solidFill>
+                <a:latin typeface="Arial"/>
+                <a:ea typeface="Arial"/>
+                <a:cs typeface="Arial"/>
               </a:rPr>
               <a:t>Milk and fortified soya alternative</a:t>
             </a:r>
@@ -6534,8 +7483,8 @@
         </p:nvSpPr>
         <p:spPr>
           <a:xfrm xmlns:a="http://schemas.openxmlformats.org/drawingml/2006/main">
-            <a:off x="609600" y="4333875"/>
-            <a:ext cx="10972800" cy="781050"/>
+            <a:off x="609600" y="4400550"/>
+            <a:ext cx="7096125" cy="914400"/>
           </a:xfrm>
           <a:prstGeom xmlns:a="http://schemas.openxmlformats.org/drawingml/2006/main" prst="rect">
             <a:avLst/>
@@ -6547,27 +7496,58 @@
           </a:ln>
         </p:spPr>
         <p:txBody>
-          <a:bodyPr xmlns:a="http://schemas.openxmlformats.org/drawingml/2006/main" lIns="0" tIns="0" rIns="0" bIns="0" anchor="ctr"/>
+          <a:bodyPr xmlns:a="http://schemas.openxmlformats.org/drawingml/2006/main" wrap="square" lIns="0" tIns="0" rIns="0" bIns="0" anchor="ctr">
+            <a:noAutofit/>
+          </a:bodyPr>
           <a:lstStyle xmlns:a="http://schemas.openxmlformats.org/drawingml/2006/main"/>
           <a:p xmlns:a="http://schemas.openxmlformats.org/drawingml/2006/main">
             <a:pPr>
-              <a:defRPr sz="2550" b="0">
-                <a:solidFill>
-                  <a:srgbClr val="152B3A"/>
-                </a:solidFill>
+              <a:buNone/>
+              <a:defRPr sz="2550" b="1">
+                <a:solidFill>
+                  <a:srgbClr val="28685E"/>
+                </a:solidFill>
+                <a:latin typeface="Arial"/>
+                <a:ea typeface="Arial"/>
+                <a:cs typeface="Arial"/>
               </a:defRPr>
             </a:pPr>
             <a:r>
-              <a:rPr sz="2550" b="0">
-                <a:solidFill>
-                  <a:srgbClr val="152B3A"/>
-                </a:solidFill>
+              <a:rPr sz="2550" b="1">
+                <a:solidFill>
+                  <a:srgbClr val="28685E"/>
+                </a:solidFill>
+                <a:latin typeface="Arial"/>
+                <a:ea typeface="Arial"/>
+                <a:cs typeface="Arial"/>
               </a:rPr>
               <a:t>Name the group; then check the labels.</a:t>
             </a:r>
           </a:p>
         </p:txBody>
       </p:sp>
+      <p:pic>
+        <p:nvPicPr>
+          <p:cNvPr id="24" name=""/>
+          <p:cNvPicPr>
+            <a:picLocks xmlns:a="http://schemas.openxmlformats.org/drawingml/2006/main" noChangeAspect="1"/>
+          </p:cNvPicPr>
+          <p:nvPr/>
+        </p:nvPicPr>
+        <p:blipFill>
+          <a:blip xmlns:r="http://schemas.openxmlformats.org/officeDocument/2006/relationships" xmlns:a="http://schemas.openxmlformats.org/drawingml/2006/main" r:embed="R75678be201cc4175"/>
+          <a:stretch xmlns:a="http://schemas.openxmlformats.org/drawingml/2006/main"/>
+        </p:blipFill>
+        <p:spPr>
+          <a:xfrm xmlns:a="http://schemas.openxmlformats.org/drawingml/2006/main">
+            <a:off x="8614172" y="2686050"/>
+            <a:ext cx="2488406" cy="2714625"/>
+          </a:xfrm>
+          <a:prstGeom xmlns:a="http://schemas.openxmlformats.org/drawingml/2006/main" prst="rect">
+            <a:avLst/>
+          </a:prstGeom>
+        </p:spPr>
+      </p:pic>
     </p:spTree>
     <p:extLst>
       <p:ext uri="{BB962C8B-B14F-4D97-AF65-F5344CB8AC3E}">
@@ -6584,7 +7564,7 @@
     <p:bg>
       <p:bgPr>
         <a:solidFill xmlns:a="http://schemas.openxmlformats.org/drawingml/2006/main">
-          <a:srgbClr val="F5F1E8"/>
+          <a:srgbClr val="FBF9F3"/>
         </a:solidFill>
       </p:bgPr>
     </p:bg>
@@ -6613,8 +7593,8 @@
         </p:nvSpPr>
         <p:spPr>
           <a:xfrm xmlns:a="http://schemas.openxmlformats.org/drawingml/2006/main">
-            <a:off x="609600" y="552450"/>
-            <a:ext cx="781050" cy="57150"/>
+            <a:off x="609600" y="742950"/>
+            <a:ext cx="9906000" cy="38100"/>
           </a:xfrm>
           <a:prstGeom xmlns:a="http://schemas.openxmlformats.org/drawingml/2006/main" prst="rect">
             <a:avLst/>
@@ -6644,8 +7624,8 @@
         </p:nvSpPr>
         <p:spPr>
           <a:xfrm xmlns:a="http://schemas.openxmlformats.org/drawingml/2006/main">
-            <a:off x="609600" y="762000"/>
-            <a:ext cx="9334500" cy="285750"/>
+            <a:off x="609600" y="342900"/>
+            <a:ext cx="9334500" cy="266700"/>
           </a:xfrm>
           <a:prstGeom xmlns:a="http://schemas.openxmlformats.org/drawingml/2006/main" prst="rect">
             <a:avLst/>
@@ -6657,21 +7637,30 @@
           </a:ln>
         </p:spPr>
         <p:txBody>
-          <a:bodyPr xmlns:a="http://schemas.openxmlformats.org/drawingml/2006/main" lIns="0" tIns="0" rIns="0" bIns="0" anchor="ctr"/>
+          <a:bodyPr xmlns:a="http://schemas.openxmlformats.org/drawingml/2006/main" wrap="square" lIns="0" tIns="0" rIns="0" bIns="0" anchor="ctr">
+            <a:noAutofit/>
+          </a:bodyPr>
           <a:lstStyle xmlns:a="http://schemas.openxmlformats.org/drawingml/2006/main"/>
           <a:p xmlns:a="http://schemas.openxmlformats.org/drawingml/2006/main">
             <a:pPr>
-              <a:defRPr sz="1500" b="1">
+              <a:buNone/>
+              <a:defRPr sz="1425" b="1">
                 <a:solidFill>
                   <a:srgbClr val="28685E"/>
                 </a:solidFill>
+                <a:latin typeface="Arial"/>
+                <a:ea typeface="Arial"/>
+                <a:cs typeface="Arial"/>
               </a:defRPr>
             </a:pPr>
             <a:r>
-              <a:rPr sz="1500" b="1">
+              <a:rPr sz="1425" b="1">
                 <a:solidFill>
                   <a:srgbClr val="28685E"/>
                 </a:solidFill>
+                <a:latin typeface="Arial"/>
+                <a:ea typeface="Arial"/>
+                <a:cs typeface="Arial"/>
               </a:rPr>
               <a:t>MADE BY MATT  /  BUILD SCIENCE</a:t>
             </a:r>
@@ -6680,14 +7669,14 @@
       </p:sp>
       <p:pic>
         <p:nvPicPr>
-          <p:cNvPr id="14" name=""/>
+          <p:cNvPr id="18" name=""/>
           <p:cNvPicPr>
             <a:picLocks xmlns:a="http://schemas.openxmlformats.org/drawingml/2006/main" noChangeAspect="1"/>
           </p:cNvPicPr>
           <p:nvPr/>
         </p:nvPicPr>
         <p:blipFill>
-          <a:blip xmlns:r="http://schemas.openxmlformats.org/officeDocument/2006/relationships" xmlns:a="http://schemas.openxmlformats.org/drawingml/2006/main" r:embed="R74f9e55df8184bfe"/>
+          <a:blip xmlns:r="http://schemas.openxmlformats.org/officeDocument/2006/relationships" xmlns:a="http://schemas.openxmlformats.org/drawingml/2006/main" r:embed="R95bfa9b1503e430f"/>
           <a:stretch xmlns:a="http://schemas.openxmlformats.org/drawingml/2006/main"/>
         </p:blipFill>
         <p:spPr>
@@ -6716,8 +7705,8 @@
         </p:nvSpPr>
         <p:spPr>
           <a:xfrm xmlns:a="http://schemas.openxmlformats.org/drawingml/2006/main">
-            <a:off x="609600" y="1352550"/>
-            <a:ext cx="10972800" cy="952500"/>
+            <a:off x="609600" y="1047750"/>
+            <a:ext cx="10972800" cy="895350"/>
           </a:xfrm>
           <a:prstGeom xmlns:a="http://schemas.openxmlformats.org/drawingml/2006/main" prst="rect">
             <a:avLst/>
@@ -6729,21 +7718,30 @@
           </a:ln>
         </p:spPr>
         <p:txBody>
-          <a:bodyPr xmlns:a="http://schemas.openxmlformats.org/drawingml/2006/main" lIns="0" tIns="0" rIns="0" bIns="0" anchor="ctr"/>
+          <a:bodyPr xmlns:a="http://schemas.openxmlformats.org/drawingml/2006/main" wrap="square" lIns="0" tIns="0" rIns="0" bIns="0" anchor="ctr">
+            <a:noAutofit/>
+          </a:bodyPr>
           <a:lstStyle xmlns:a="http://schemas.openxmlformats.org/drawingml/2006/main"/>
           <a:p xmlns:a="http://schemas.openxmlformats.org/drawingml/2006/main">
             <a:pPr>
-              <a:defRPr sz="3750" b="1">
+              <a:buNone/>
+              <a:defRPr sz="3600" b="1">
                 <a:solidFill>
                   <a:srgbClr val="152B3A"/>
                 </a:solidFill>
+                <a:latin typeface="Arial"/>
+                <a:ea typeface="Arial"/>
+                <a:cs typeface="Arial"/>
               </a:defRPr>
             </a:pPr>
             <a:r>
-              <a:rPr sz="3750" b="1">
+              <a:rPr sz="3600" b="1">
                 <a:solidFill>
                   <a:srgbClr val="152B3A"/>
                 </a:solidFill>
+                <a:latin typeface="Arial"/>
+                <a:ea typeface="Arial"/>
+                <a:cs typeface="Arial"/>
               </a:rPr>
               <a:t>What does balance mean?</a:t>
             </a:r>
@@ -6810,21 +7808,30 @@
           </a:ln>
         </p:spPr>
         <p:txBody>
-          <a:bodyPr xmlns:a="http://schemas.openxmlformats.org/drawingml/2006/main" lIns="0" tIns="0" rIns="0" bIns="0" anchor="ctr"/>
+          <a:bodyPr xmlns:a="http://schemas.openxmlformats.org/drawingml/2006/main" wrap="square" lIns="0" tIns="0" rIns="0" bIns="0" anchor="ctr">
+            <a:noAutofit/>
+          </a:bodyPr>
           <a:lstStyle xmlns:a="http://schemas.openxmlformats.org/drawingml/2006/main"/>
           <a:p xmlns:a="http://schemas.openxmlformats.org/drawingml/2006/main">
             <a:pPr>
-              <a:defRPr sz="1275" b="0">
+              <a:buNone/>
+              <a:defRPr sz="1200" b="0">
                 <a:solidFill>
                   <a:srgbClr val="50616B"/>
                 </a:solidFill>
+                <a:latin typeface="Arial"/>
+                <a:ea typeface="Arial"/>
+                <a:cs typeface="Arial"/>
               </a:defRPr>
             </a:pPr>
             <a:r>
-              <a:rPr sz="1275" b="0">
+              <a:rPr sz="1200" b="0">
                 <a:solidFill>
                   <a:srgbClr val="50616B"/>
                 </a:solidFill>
+                <a:latin typeface="Arial"/>
+                <a:ea typeface="Arial"/>
+                <a:cs typeface="Arial"/>
               </a:rPr>
               <a:t>AUTUMN 1  ·  WEEK 6  ·  LESSON A</a:t>
             </a:r>
@@ -6860,14 +7867,20 @@
           </a:ln>
         </p:spPr>
         <p:txBody>
-          <a:bodyPr xmlns:a="http://schemas.openxmlformats.org/drawingml/2006/main" lIns="0" tIns="0" rIns="0" bIns="0" anchor="ctr"/>
+          <a:bodyPr xmlns:a="http://schemas.openxmlformats.org/drawingml/2006/main" wrap="square" lIns="0" tIns="0" rIns="0" bIns="0" anchor="ctr">
+            <a:noAutofit/>
+          </a:bodyPr>
           <a:lstStyle xmlns:a="http://schemas.openxmlformats.org/drawingml/2006/main"/>
           <a:p xmlns:a="http://schemas.openxmlformats.org/drawingml/2006/main">
             <a:pPr>
+              <a:buNone/>
               <a:defRPr sz="1350" b="1">
                 <a:solidFill>
                   <a:srgbClr val="28685E"/>
                 </a:solidFill>
+                <a:latin typeface="Arial"/>
+                <a:ea typeface="Arial"/>
+                <a:cs typeface="Arial"/>
               </a:defRPr>
             </a:pPr>
             <a:r>
@@ -6875,6 +7888,9 @@
                 <a:solidFill>
                   <a:srgbClr val="28685E"/>
                 </a:solidFill>
+                <a:latin typeface="Arial"/>
+                <a:ea typeface="Arial"/>
+                <a:cs typeface="Arial"/>
               </a:rPr>
               <a:t>08</a:t>
             </a:r>
@@ -6897,8 +7913,8 @@
         </p:nvSpPr>
         <p:spPr>
           <a:xfrm xmlns:a="http://schemas.openxmlformats.org/drawingml/2006/main">
-            <a:off x="609600" y="2619375"/>
-            <a:ext cx="4953000" cy="428625"/>
+            <a:off x="609600" y="2257425"/>
+            <a:ext cx="5143500" cy="533400"/>
           </a:xfrm>
           <a:prstGeom xmlns:a="http://schemas.openxmlformats.org/drawingml/2006/main" prst="rect">
             <a:avLst/>
@@ -6910,21 +7926,30 @@
           </a:ln>
         </p:spPr>
         <p:txBody>
-          <a:bodyPr xmlns:a="http://schemas.openxmlformats.org/drawingml/2006/main" lIns="0" tIns="0" rIns="0" bIns="0" anchor="ctr"/>
+          <a:bodyPr xmlns:a="http://schemas.openxmlformats.org/drawingml/2006/main" wrap="square" lIns="0" tIns="0" rIns="0" bIns="0" anchor="ctr">
+            <a:noAutofit/>
+          </a:bodyPr>
           <a:lstStyle xmlns:a="http://schemas.openxmlformats.org/drawingml/2006/main"/>
           <a:p xmlns:a="http://schemas.openxmlformats.org/drawingml/2006/main">
             <a:pPr>
-              <a:defRPr sz="2025" b="1">
+              <a:buNone/>
+              <a:defRPr sz="2100" b="1">
                 <a:solidFill>
                   <a:srgbClr val="28685E"/>
                 </a:solidFill>
+                <a:latin typeface="Arial"/>
+                <a:ea typeface="Arial"/>
+                <a:cs typeface="Arial"/>
               </a:defRPr>
             </a:pPr>
             <a:r>
-              <a:rPr sz="2025" b="1">
+              <a:rPr sz="2100" b="1">
                 <a:solidFill>
                   <a:srgbClr val="28685E"/>
                 </a:solidFill>
+                <a:latin typeface="Arial"/>
+                <a:ea typeface="Arial"/>
+                <a:cs typeface="Arial"/>
               </a:rPr>
               <a:t>THE MODEL HELPS SHOW</a:t>
             </a:r>
@@ -6947,8 +7972,8 @@
         </p:nvSpPr>
         <p:spPr>
           <a:xfrm xmlns:a="http://schemas.openxmlformats.org/drawingml/2006/main">
-            <a:off x="6572250" y="2619375"/>
-            <a:ext cx="4953000" cy="428625"/>
+            <a:off x="6572250" y="2257425"/>
+            <a:ext cx="5010150" cy="533400"/>
           </a:xfrm>
           <a:prstGeom xmlns:a="http://schemas.openxmlformats.org/drawingml/2006/main" prst="rect">
             <a:avLst/>
@@ -6960,21 +7985,30 @@
           </a:ln>
         </p:spPr>
         <p:txBody>
-          <a:bodyPr xmlns:a="http://schemas.openxmlformats.org/drawingml/2006/main" lIns="0" tIns="0" rIns="0" bIns="0" anchor="ctr"/>
+          <a:bodyPr xmlns:a="http://schemas.openxmlformats.org/drawingml/2006/main" wrap="square" lIns="0" tIns="0" rIns="0" bIns="0" anchor="ctr">
+            <a:noAutofit/>
+          </a:bodyPr>
           <a:lstStyle xmlns:a="http://schemas.openxmlformats.org/drawingml/2006/main"/>
           <a:p xmlns:a="http://schemas.openxmlformats.org/drawingml/2006/main">
             <a:pPr>
-              <a:defRPr sz="2025" b="1">
+              <a:buNone/>
+              <a:defRPr sz="2100" b="1">
                 <a:solidFill>
                   <a:srgbClr val="A65D25"/>
                 </a:solidFill>
+                <a:latin typeface="Arial"/>
+                <a:ea typeface="Arial"/>
+                <a:cs typeface="Arial"/>
               </a:defRPr>
             </a:pPr>
             <a:r>
-              <a:rPr sz="2025" b="1">
+              <a:rPr sz="2100" b="1">
                 <a:solidFill>
                   <a:srgbClr val="A65D25"/>
                 </a:solidFill>
+                <a:latin typeface="Arial"/>
+                <a:ea typeface="Arial"/>
+                <a:cs typeface="Arial"/>
               </a:rPr>
               <a:t>IT DOES NOT REQUIRE</a:t>
             </a:r>
@@ -6997,8 +8031,8 @@
         </p:nvSpPr>
         <p:spPr>
           <a:xfrm xmlns:a="http://schemas.openxmlformats.org/drawingml/2006/main">
-            <a:off x="609600" y="3333750"/>
-            <a:ext cx="4953000" cy="2524125"/>
+            <a:off x="609600" y="3238500"/>
+            <a:ext cx="5143500" cy="2286000"/>
           </a:xfrm>
           <a:prstGeom xmlns:a="http://schemas.openxmlformats.org/drawingml/2006/main" prst="rect">
             <a:avLst/>
@@ -7010,14 +8044,20 @@
           </a:ln>
         </p:spPr>
         <p:txBody>
-          <a:bodyPr xmlns:a="http://schemas.openxmlformats.org/drawingml/2006/main" lIns="0" tIns="0" rIns="0" bIns="0" anchor="ctr"/>
+          <a:bodyPr xmlns:a="http://schemas.openxmlformats.org/drawingml/2006/main" wrap="square" lIns="0" tIns="0" rIns="0" bIns="0" anchor="ctr">
+            <a:noAutofit/>
+          </a:bodyPr>
           <a:lstStyle xmlns:a="http://schemas.openxmlformats.org/drawingml/2006/main"/>
           <a:p xmlns:a="http://schemas.openxmlformats.org/drawingml/2006/main">
             <a:pPr>
+              <a:buNone/>
               <a:defRPr sz="2400" b="0">
                 <a:solidFill>
                   <a:srgbClr val="152B3A"/>
                 </a:solidFill>
+                <a:latin typeface="Arial"/>
+                <a:ea typeface="Arial"/>
+                <a:cs typeface="Arial"/>
               </a:defRPr>
             </a:pPr>
             <a:r>
@@ -7025,16 +8065,23 @@
                 <a:solidFill>
                   <a:srgbClr val="152B3A"/>
                 </a:solidFill>
+                <a:latin typeface="Arial"/>
+                <a:ea typeface="Arial"/>
+                <a:cs typeface="Arial"/>
               </a:rPr>
               <a:t>A range across the groups.</a:t>
             </a:r>
           </a:p>
           <a:p xmlns:a="http://schemas.openxmlformats.org/drawingml/2006/main">
             <a:pPr>
+              <a:buNone/>
               <a:defRPr sz="2400" b="0">
                 <a:solidFill>
                   <a:srgbClr val="152B3A"/>
                 </a:solidFill>
+                <a:latin typeface="Arial"/>
+                <a:ea typeface="Arial"/>
+                <a:cs typeface="Arial"/>
               </a:defRPr>
             </a:pPr>
             <a:r>
@@ -7042,16 +8089,23 @@
                 <a:solidFill>
                   <a:srgbClr val="152B3A"/>
                 </a:solidFill>
+                <a:latin typeface="Arial"/>
+                <a:ea typeface="Arial"/>
+                <a:cs typeface="Arial"/>
               </a:rPr>
               <a:t>Variety within the groups.</a:t>
             </a:r>
           </a:p>
           <a:p xmlns:a="http://schemas.openxmlformats.org/drawingml/2006/main">
             <a:pPr>
+              <a:buNone/>
               <a:defRPr sz="2400" b="0">
                 <a:solidFill>
                   <a:srgbClr val="152B3A"/>
                 </a:solidFill>
+                <a:latin typeface="Arial"/>
+                <a:ea typeface="Arial"/>
+                <a:cs typeface="Arial"/>
               </a:defRPr>
             </a:pPr>
             <a:r>
@@ -7059,6 +8113,9 @@
                 <a:solidFill>
                   <a:srgbClr val="152B3A"/>
                 </a:solidFill>
+                <a:latin typeface="Arial"/>
+                <a:ea typeface="Arial"/>
+                <a:cs typeface="Arial"/>
               </a:rPr>
               <a:t>Patterns over a day or week.</a:t>
             </a:r>
@@ -7081,8 +8138,8 @@
         </p:nvSpPr>
         <p:spPr>
           <a:xfrm xmlns:a="http://schemas.openxmlformats.org/drawingml/2006/main">
-            <a:off x="6572250" y="3333750"/>
-            <a:ext cx="4857750" cy="2524125"/>
+            <a:off x="6572250" y="3238500"/>
+            <a:ext cx="5010150" cy="2286000"/>
           </a:xfrm>
           <a:prstGeom xmlns:a="http://schemas.openxmlformats.org/drawingml/2006/main" prst="rect">
             <a:avLst/>
@@ -7094,14 +8151,20 @@
           </a:ln>
         </p:spPr>
         <p:txBody>
-          <a:bodyPr xmlns:a="http://schemas.openxmlformats.org/drawingml/2006/main" lIns="0" tIns="0" rIns="0" bIns="0" anchor="ctr"/>
+          <a:bodyPr xmlns:a="http://schemas.openxmlformats.org/drawingml/2006/main" wrap="square" lIns="0" tIns="0" rIns="0" bIns="0" anchor="ctr">
+            <a:noAutofit/>
+          </a:bodyPr>
           <a:lstStyle xmlns:a="http://schemas.openxmlformats.org/drawingml/2006/main"/>
           <a:p xmlns:a="http://schemas.openxmlformats.org/drawingml/2006/main">
             <a:pPr>
+              <a:buNone/>
               <a:defRPr sz="2400" b="0">
                 <a:solidFill>
                   <a:srgbClr val="152B3A"/>
                 </a:solidFill>
+                <a:latin typeface="Arial"/>
+                <a:ea typeface="Arial"/>
+                <a:cs typeface="Arial"/>
               </a:defRPr>
             </a:pPr>
             <a:r>
@@ -7109,16 +8172,23 @@
                 <a:solidFill>
                   <a:srgbClr val="152B3A"/>
                 </a:solidFill>
+                <a:latin typeface="Arial"/>
+                <a:ea typeface="Arial"/>
+                <a:cs typeface="Arial"/>
               </a:rPr>
               <a:t>Every meal to copy a diagram.</a:t>
             </a:r>
           </a:p>
           <a:p xmlns:a="http://schemas.openxmlformats.org/drawingml/2006/main">
             <a:pPr>
+              <a:buNone/>
               <a:defRPr sz="2400" b="0">
                 <a:solidFill>
                   <a:srgbClr val="152B3A"/>
                 </a:solidFill>
+                <a:latin typeface="Arial"/>
+                <a:ea typeface="Arial"/>
+                <a:cs typeface="Arial"/>
               </a:defRPr>
             </a:pPr>
             <a:r>
@@ -7126,16 +8196,23 @@
                 <a:solidFill>
                   <a:srgbClr val="152B3A"/>
                 </a:solidFill>
+                <a:latin typeface="Arial"/>
+                <a:ea typeface="Arial"/>
+                <a:cs typeface="Arial"/>
               </a:rPr>
               <a:t>Exact portions from these cards.</a:t>
             </a:r>
           </a:p>
           <a:p xmlns:a="http://schemas.openxmlformats.org/drawingml/2006/main">
             <a:pPr>
+              <a:buNone/>
               <a:defRPr sz="2400" b="0">
                 <a:solidFill>
                   <a:srgbClr val="152B3A"/>
                 </a:solidFill>
+                <a:latin typeface="Arial"/>
+                <a:ea typeface="Arial"/>
+                <a:cs typeface="Arial"/>
               </a:defRPr>
             </a:pPr>
             <a:r>
@@ -7143,11 +8220,76 @@
                 <a:solidFill>
                   <a:srgbClr val="152B3A"/>
                 </a:solidFill>
+                <a:latin typeface="Arial"/>
+                <a:ea typeface="Arial"/>
+                <a:cs typeface="Arial"/>
               </a:rPr>
               <a:t>Judging anyone’s real food.</a:t>
             </a:r>
           </a:p>
         </p:txBody>
+      </p:sp>
+      <p:sp>
+        <p:nvSpPr>
+          <p:cNvPr id="14" name="">
+            <a:extLst xmlns:a="http://schemas.openxmlformats.org/drawingml/2006/main">
+              <a:ext uri="{FF2B5EF4-FFF2-40B4-BE49-F238E27FC236}">
+                <a16:creationId xmlns:a16="http://schemas.microsoft.com/office/drawing/2014/main" id="{A9836CBF-4CEE-420E-8D67-E5E4E60DB581}"/>
+              </a:ext>
+            </a:extLst>
+          </p:cNvPr>
+          <p:cNvSpPr>
+            <a:spLocks xmlns:a="http://schemas.openxmlformats.org/drawingml/2006/main" noGrp="1"/>
+          </p:cNvSpPr>
+          <p:nvPr/>
+        </p:nvSpPr>
+        <p:spPr>
+          <a:xfrm xmlns:a="http://schemas.openxmlformats.org/drawingml/2006/main">
+            <a:off x="609600" y="2886075"/>
+            <a:ext cx="5048250" cy="0"/>
+          </a:xfrm>
+          <a:prstGeom xmlns:a="http://schemas.openxmlformats.org/drawingml/2006/main" prst="line">
+            <a:avLst/>
+          </a:prstGeom>
+          <a:noFill xmlns:a="http://schemas.openxmlformats.org/drawingml/2006/main"/>
+          <a:ln xmlns:a="http://schemas.openxmlformats.org/drawingml/2006/main" w="28575">
+            <a:solidFill>
+              <a:srgbClr val="DCE7DD"/>
+            </a:solidFill>
+            <a:prstDash val="solid"/>
+          </a:ln>
+        </p:spPr>
+      </p:sp>
+      <p:sp>
+        <p:nvSpPr>
+          <p:cNvPr id="15" name="">
+            <a:extLst xmlns:a="http://schemas.openxmlformats.org/drawingml/2006/main">
+              <a:ext uri="{FF2B5EF4-FFF2-40B4-BE49-F238E27FC236}">
+                <a16:creationId xmlns:a16="http://schemas.microsoft.com/office/drawing/2014/main" id="{45E20009-CE89-45EA-998D-E4A3C921F935}"/>
+              </a:ext>
+            </a:extLst>
+          </p:cNvPr>
+          <p:cNvSpPr>
+            <a:spLocks xmlns:a="http://schemas.openxmlformats.org/drawingml/2006/main" noGrp="1"/>
+          </p:cNvSpPr>
+          <p:nvPr/>
+        </p:nvSpPr>
+        <p:spPr>
+          <a:xfrm xmlns:a="http://schemas.openxmlformats.org/drawingml/2006/main">
+            <a:off x="6572250" y="2886075"/>
+            <a:ext cx="5010150" cy="0"/>
+          </a:xfrm>
+          <a:prstGeom xmlns:a="http://schemas.openxmlformats.org/drawingml/2006/main" prst="line">
+            <a:avLst/>
+          </a:prstGeom>
+          <a:noFill xmlns:a="http://schemas.openxmlformats.org/drawingml/2006/main"/>
+          <a:ln xmlns:a="http://schemas.openxmlformats.org/drawingml/2006/main" w="28575">
+            <a:solidFill>
+              <a:srgbClr val="DCE7DD"/>
+            </a:solidFill>
+            <a:prstDash val="solid"/>
+          </a:ln>
+        </p:spPr>
       </p:sp>
     </p:spTree>
     <p:extLst>
@@ -7165,7 +8307,7 @@
     <p:bg>
       <p:bgPr>
         <a:solidFill xmlns:a="http://schemas.openxmlformats.org/drawingml/2006/main">
-          <a:srgbClr val="F5F1E8"/>
+          <a:srgbClr val="FBF9F3"/>
         </a:solidFill>
       </p:bgPr>
     </p:bg>
@@ -7194,8 +8336,8 @@
         </p:nvSpPr>
         <p:spPr>
           <a:xfrm xmlns:a="http://schemas.openxmlformats.org/drawingml/2006/main">
-            <a:off x="609600" y="552450"/>
-            <a:ext cx="781050" cy="57150"/>
+            <a:off x="609600" y="742950"/>
+            <a:ext cx="9906000" cy="38100"/>
           </a:xfrm>
           <a:prstGeom xmlns:a="http://schemas.openxmlformats.org/drawingml/2006/main" prst="rect">
             <a:avLst/>
@@ -7225,8 +8367,8 @@
         </p:nvSpPr>
         <p:spPr>
           <a:xfrm xmlns:a="http://schemas.openxmlformats.org/drawingml/2006/main">
-            <a:off x="609600" y="762000"/>
-            <a:ext cx="9334500" cy="285750"/>
+            <a:off x="609600" y="342900"/>
+            <a:ext cx="9334500" cy="266700"/>
           </a:xfrm>
           <a:prstGeom xmlns:a="http://schemas.openxmlformats.org/drawingml/2006/main" prst="rect">
             <a:avLst/>
@@ -7238,21 +8380,30 @@
           </a:ln>
         </p:spPr>
         <p:txBody>
-          <a:bodyPr xmlns:a="http://schemas.openxmlformats.org/drawingml/2006/main" lIns="0" tIns="0" rIns="0" bIns="0" anchor="ctr"/>
+          <a:bodyPr xmlns:a="http://schemas.openxmlformats.org/drawingml/2006/main" wrap="square" lIns="0" tIns="0" rIns="0" bIns="0" anchor="ctr">
+            <a:noAutofit/>
+          </a:bodyPr>
           <a:lstStyle xmlns:a="http://schemas.openxmlformats.org/drawingml/2006/main"/>
           <a:p xmlns:a="http://schemas.openxmlformats.org/drawingml/2006/main">
             <a:pPr>
-              <a:defRPr sz="1500" b="1">
+              <a:buNone/>
+              <a:defRPr sz="1425" b="1">
                 <a:solidFill>
                   <a:srgbClr val="28685E"/>
                 </a:solidFill>
+                <a:latin typeface="Arial"/>
+                <a:ea typeface="Arial"/>
+                <a:cs typeface="Arial"/>
               </a:defRPr>
             </a:pPr>
             <a:r>
-              <a:rPr sz="1500" b="1">
+              <a:rPr sz="1425" b="1">
                 <a:solidFill>
                   <a:srgbClr val="28685E"/>
                 </a:solidFill>
+                <a:latin typeface="Arial"/>
+                <a:ea typeface="Arial"/>
+                <a:cs typeface="Arial"/>
               </a:rPr>
               <a:t>MADE BY MATT  /  BUILD SCIENCE</a:t>
             </a:r>
@@ -7261,14 +8412,14 @@
       </p:sp>
       <p:pic>
         <p:nvPicPr>
-          <p:cNvPr id="12" name=""/>
+          <p:cNvPr id="15" name=""/>
           <p:cNvPicPr>
             <a:picLocks xmlns:a="http://schemas.openxmlformats.org/drawingml/2006/main" noChangeAspect="1"/>
           </p:cNvPicPr>
           <p:nvPr/>
         </p:nvPicPr>
         <p:blipFill>
-          <a:blip xmlns:r="http://schemas.openxmlformats.org/officeDocument/2006/relationships" xmlns:a="http://schemas.openxmlformats.org/drawingml/2006/main" r:embed="Rb7ab2472d66f4d4c"/>
+          <a:blip xmlns:r="http://schemas.openxmlformats.org/officeDocument/2006/relationships" xmlns:a="http://schemas.openxmlformats.org/drawingml/2006/main" r:embed="R4895d70e470f41af"/>
           <a:stretch xmlns:a="http://schemas.openxmlformats.org/drawingml/2006/main"/>
         </p:blipFill>
         <p:spPr>
@@ -7297,8 +8448,8 @@
         </p:nvSpPr>
         <p:spPr>
           <a:xfrm xmlns:a="http://schemas.openxmlformats.org/drawingml/2006/main">
-            <a:off x="609600" y="1352550"/>
-            <a:ext cx="10972800" cy="952500"/>
+            <a:off x="609600" y="1047750"/>
+            <a:ext cx="10972800" cy="895350"/>
           </a:xfrm>
           <a:prstGeom xmlns:a="http://schemas.openxmlformats.org/drawingml/2006/main" prst="rect">
             <a:avLst/>
@@ -7310,21 +8461,30 @@
           </a:ln>
         </p:spPr>
         <p:txBody>
-          <a:bodyPr xmlns:a="http://schemas.openxmlformats.org/drawingml/2006/main" lIns="0" tIns="0" rIns="0" bIns="0" anchor="ctr"/>
+          <a:bodyPr xmlns:a="http://schemas.openxmlformats.org/drawingml/2006/main" wrap="square" lIns="0" tIns="0" rIns="0" bIns="0" anchor="ctr">
+            <a:noAutofit/>
+          </a:bodyPr>
           <a:lstStyle xmlns:a="http://schemas.openxmlformats.org/drawingml/2006/main"/>
           <a:p xmlns:a="http://schemas.openxmlformats.org/drawingml/2006/main">
             <a:pPr>
-              <a:defRPr sz="3750" b="1">
+              <a:buNone/>
+              <a:defRPr sz="3600" b="1">
                 <a:solidFill>
                   <a:srgbClr val="152B3A"/>
                 </a:solidFill>
+                <a:latin typeface="Arial"/>
+                <a:ea typeface="Arial"/>
+                <a:cs typeface="Arial"/>
               </a:defRPr>
             </a:pPr>
             <a:r>
-              <a:rPr sz="3750" b="1">
+              <a:rPr sz="3600" b="1">
                 <a:solidFill>
                   <a:srgbClr val="152B3A"/>
                 </a:solidFill>
+                <a:latin typeface="Arial"/>
+                <a:ea typeface="Arial"/>
+                <a:cs typeface="Arial"/>
               </a:rPr>
               <a:t>Explain it without a vague label</a:t>
             </a:r>
@@ -7391,21 +8551,30 @@
           </a:ln>
         </p:spPr>
         <p:txBody>
-          <a:bodyPr xmlns:a="http://schemas.openxmlformats.org/drawingml/2006/main" lIns="0" tIns="0" rIns="0" bIns="0" anchor="ctr"/>
+          <a:bodyPr xmlns:a="http://schemas.openxmlformats.org/drawingml/2006/main" wrap="square" lIns="0" tIns="0" rIns="0" bIns="0" anchor="ctr">
+            <a:noAutofit/>
+          </a:bodyPr>
           <a:lstStyle xmlns:a="http://schemas.openxmlformats.org/drawingml/2006/main"/>
           <a:p xmlns:a="http://schemas.openxmlformats.org/drawingml/2006/main">
             <a:pPr>
-              <a:defRPr sz="1275" b="0">
+              <a:buNone/>
+              <a:defRPr sz="1200" b="0">
                 <a:solidFill>
                   <a:srgbClr val="50616B"/>
                 </a:solidFill>
+                <a:latin typeface="Arial"/>
+                <a:ea typeface="Arial"/>
+                <a:cs typeface="Arial"/>
               </a:defRPr>
             </a:pPr>
             <a:r>
-              <a:rPr sz="1275" b="0">
+              <a:rPr sz="1200" b="0">
                 <a:solidFill>
                   <a:srgbClr val="50616B"/>
                 </a:solidFill>
+                <a:latin typeface="Arial"/>
+                <a:ea typeface="Arial"/>
+                <a:cs typeface="Arial"/>
               </a:rPr>
               <a:t>AUTUMN 1  ·  WEEK 6  ·  LESSON A</a:t>
             </a:r>
@@ -7441,14 +8610,20 @@
           </a:ln>
         </p:spPr>
         <p:txBody>
-          <a:bodyPr xmlns:a="http://schemas.openxmlformats.org/drawingml/2006/main" lIns="0" tIns="0" rIns="0" bIns="0" anchor="ctr"/>
+          <a:bodyPr xmlns:a="http://schemas.openxmlformats.org/drawingml/2006/main" wrap="square" lIns="0" tIns="0" rIns="0" bIns="0" anchor="ctr">
+            <a:noAutofit/>
+          </a:bodyPr>
           <a:lstStyle xmlns:a="http://schemas.openxmlformats.org/drawingml/2006/main"/>
           <a:p xmlns:a="http://schemas.openxmlformats.org/drawingml/2006/main">
             <a:pPr>
+              <a:buNone/>
               <a:defRPr sz="1350" b="1">
                 <a:solidFill>
                   <a:srgbClr val="28685E"/>
                 </a:solidFill>
+                <a:latin typeface="Arial"/>
+                <a:ea typeface="Arial"/>
+                <a:cs typeface="Arial"/>
               </a:defRPr>
             </a:pPr>
             <a:r>
@@ -7456,6 +8631,9 @@
                 <a:solidFill>
                   <a:srgbClr val="28685E"/>
                 </a:solidFill>
+                <a:latin typeface="Arial"/>
+                <a:ea typeface="Arial"/>
+                <a:cs typeface="Arial"/>
               </a:rPr>
               <a:t>09</a:t>
             </a:r>
@@ -7478,8 +8656,8 @@
         </p:nvSpPr>
         <p:spPr>
           <a:xfrm xmlns:a="http://schemas.openxmlformats.org/drawingml/2006/main">
-            <a:off x="609600" y="2686050"/>
-            <a:ext cx="10858500" cy="1524000"/>
+            <a:off x="609600" y="2428875"/>
+            <a:ext cx="6762750" cy="2190750"/>
           </a:xfrm>
           <a:prstGeom xmlns:a="http://schemas.openxmlformats.org/drawingml/2006/main" prst="rect">
             <a:avLst/>
@@ -7491,21 +8669,30 @@
           </a:ln>
         </p:spPr>
         <p:txBody>
-          <a:bodyPr xmlns:a="http://schemas.openxmlformats.org/drawingml/2006/main" lIns="0" tIns="0" rIns="0" bIns="0" anchor="ctr"/>
+          <a:bodyPr xmlns:a="http://schemas.openxmlformats.org/drawingml/2006/main" wrap="square" lIns="0" tIns="0" rIns="0" bIns="0" anchor="ctr">
+            <a:noAutofit/>
+          </a:bodyPr>
           <a:lstStyle xmlns:a="http://schemas.openxmlformats.org/drawingml/2006/main"/>
           <a:p xmlns:a="http://schemas.openxmlformats.org/drawingml/2006/main">
             <a:pPr>
-              <a:defRPr sz="2925" b="1">
+              <a:buNone/>
+              <a:defRPr sz="2850" b="1">
                 <a:solidFill>
                   <a:srgbClr val="28685E"/>
                 </a:solidFill>
+                <a:latin typeface="Arial"/>
+                <a:ea typeface="Arial"/>
+                <a:cs typeface="Arial"/>
               </a:defRPr>
             </a:pPr>
             <a:r>
-              <a:rPr sz="2925" b="1">
+              <a:rPr sz="2850" b="1">
                 <a:solidFill>
                   <a:srgbClr val="28685E"/>
                 </a:solidFill>
+                <a:latin typeface="Arial"/>
+                <a:ea typeface="Arial"/>
+                <a:cs typeface="Arial"/>
               </a:rPr>
               <a:t>A balanced pattern includes a range of food groups over a day or week.</a:t>
             </a:r>
@@ -7528,8 +8715,8 @@
         </p:nvSpPr>
         <p:spPr>
           <a:xfrm xmlns:a="http://schemas.openxmlformats.org/drawingml/2006/main">
-            <a:off x="609600" y="4552950"/>
-            <a:ext cx="10858500" cy="1285875"/>
+            <a:off x="609600" y="4972050"/>
+            <a:ext cx="7191375" cy="981075"/>
           </a:xfrm>
           <a:prstGeom xmlns:a="http://schemas.openxmlformats.org/drawingml/2006/main" prst="rect">
             <a:avLst/>
@@ -7541,27 +8728,58 @@
           </a:ln>
         </p:spPr>
         <p:txBody>
-          <a:bodyPr xmlns:a="http://schemas.openxmlformats.org/drawingml/2006/main" lIns="0" tIns="0" rIns="0" bIns="0" anchor="ctr"/>
+          <a:bodyPr xmlns:a="http://schemas.openxmlformats.org/drawingml/2006/main" wrap="square" lIns="0" tIns="0" rIns="0" bIns="0" anchor="ctr">
+            <a:noAutofit/>
+          </a:bodyPr>
           <a:lstStyle xmlns:a="http://schemas.openxmlformats.org/drawingml/2006/main"/>
           <a:p xmlns:a="http://schemas.openxmlformats.org/drawingml/2006/main">
             <a:pPr>
-              <a:defRPr sz="2700" b="0">
+              <a:buNone/>
+              <a:defRPr sz="2325" b="0">
                 <a:solidFill>
                   <a:srgbClr val="152B3A"/>
                 </a:solidFill>
+                <a:latin typeface="Arial"/>
+                <a:ea typeface="Arial"/>
+                <a:cs typeface="Arial"/>
               </a:defRPr>
             </a:pPr>
             <a:r>
-              <a:rPr sz="2700" b="0">
+              <a:rPr sz="2325" b="0">
                 <a:solidFill>
                   <a:srgbClr val="152B3A"/>
                 </a:solidFill>
+                <a:latin typeface="Arial"/>
+                <a:ea typeface="Arial"/>
+                <a:cs typeface="Arial"/>
               </a:rPr>
               <a:t>One plate of cards cannot show all a person’s food needs.</a:t>
             </a:r>
           </a:p>
         </p:txBody>
       </p:sp>
+      <p:pic>
+        <p:nvPicPr>
+          <p:cNvPr id="22" name=""/>
+          <p:cNvPicPr>
+            <a:picLocks xmlns:a="http://schemas.openxmlformats.org/drawingml/2006/main" noChangeAspect="1"/>
+          </p:cNvPicPr>
+          <p:nvPr/>
+        </p:nvPicPr>
+        <p:blipFill>
+          <a:blip xmlns:r="http://schemas.openxmlformats.org/officeDocument/2006/relationships" xmlns:a="http://schemas.openxmlformats.org/drawingml/2006/main" r:embed="R0eca065e1b1744cd"/>
+          <a:stretch xmlns:a="http://schemas.openxmlformats.org/drawingml/2006/main"/>
+        </p:blipFill>
+        <p:spPr>
+          <a:xfrm xmlns:a="http://schemas.openxmlformats.org/drawingml/2006/main">
+            <a:off x="8585147" y="2628900"/>
+            <a:ext cx="2451206" cy="2524125"/>
+          </a:xfrm>
+          <a:prstGeom xmlns:a="http://schemas.openxmlformats.org/drawingml/2006/main" prst="rect">
+            <a:avLst/>
+          </a:prstGeom>
+        </p:spPr>
+      </p:pic>
     </p:spTree>
     <p:extLst>
       <p:ext uri="{BB962C8B-B14F-4D97-AF65-F5344CB8AC3E}">
